--- a/active_learning/presentation.pptx
+++ b/active_learning/presentation.pptx
@@ -6,14 +6,15 @@
     <p:sldMasterId id="2147483660" r:id="rId2"/>
   </p:sldMasterIdLst>
   <p:notesMasterIdLst>
-    <p:notesMasterId r:id="rId8"/>
+    <p:notesMasterId r:id="rId9"/>
   </p:notesMasterIdLst>
   <p:sldIdLst>
     <p:sldId id="256" r:id="rId3"/>
     <p:sldId id="257" r:id="rId4"/>
     <p:sldId id="258" r:id="rId5"/>
     <p:sldId id="259" r:id="rId6"/>
-    <p:sldId id="260" r:id="rId7"/>
+    <p:sldId id="261" r:id="rId7"/>
+    <p:sldId id="262" r:id="rId8"/>
   </p:sldIdLst>
   <p:sldSz cx="12192000" cy="6858000"/>
   <p:notesSz cx="6858000" cy="9144000"/>
@@ -202,7 +203,7 @@
           <a:p>
             <a:fld id="{9A0DA93C-7D48-44C3-89F5-B64E45B1D75E}" type="datetimeFigureOut">
               <a:rPr lang="en-DK" smtClean="0"/>
-              <a:t>04/09/2025</a:t>
+              <a:t>10/09/2025</a:t>
             </a:fld>
             <a:endParaRPr lang="en-DK"/>
           </a:p>
@@ -514,7 +515,332 @@
           <a:bodyPr/>
           <a:lstStyle/>
           <a:p>
+            <a:r>
+              <a:rPr lang="en-GB" dirty="0"/>
+              <a:t>Cause of death datasets have become available recently, which is nice</a:t>
+            </a:r>
+          </a:p>
+          <a:p>
+            <a:endParaRPr lang="en-GB" dirty="0"/>
+          </a:p>
+          <a:p>
+            <a:r>
+              <a:rPr lang="en-GB" dirty="0"/>
+              <a:t>Coding cause of death by hand takes a lot of time and nearly impossible to code a full dataset</a:t>
+            </a:r>
+          </a:p>
+          <a:p>
+            <a:endParaRPr lang="en-GB" dirty="0"/>
+          </a:p>
+          <a:p>
+            <a:r>
+              <a:rPr lang="en-GB" dirty="0"/>
+              <a:t>Machine learning (might) be a great help here, to classify some of the dataset and use for training to classify the rest!</a:t>
+            </a:r>
             <a:endParaRPr lang="en-DK" dirty="0"/>
+          </a:p>
+        </p:txBody>
+      </p:sp>
+      <p:sp>
+        <p:nvSpPr>
+          <p:cNvPr id="4" name="Slide Number Placeholder 3"/>
+          <p:cNvSpPr>
+            <a:spLocks noGrp="1"/>
+          </p:cNvSpPr>
+          <p:nvPr>
+            <p:ph type="sldNum" sz="quarter" idx="5"/>
+          </p:nvPr>
+        </p:nvSpPr>
+        <p:spPr/>
+        <p:txBody>
+          <a:bodyPr/>
+          <a:lstStyle/>
+          <a:p>
+            <a:fld id="{7C9C0BC2-923C-498A-9FC1-46FB3490DD7A}" type="slidenum">
+              <a:rPr lang="en-DK" smtClean="0"/>
+              <a:t>2</a:t>
+            </a:fld>
+            <a:endParaRPr lang="en-DK"/>
+          </a:p>
+        </p:txBody>
+      </p:sp>
+    </p:spTree>
+    <p:extLst>
+      <p:ext uri="{BB962C8B-B14F-4D97-AF65-F5344CB8AC3E}">
+        <p14:creationId xmlns:p14="http://schemas.microsoft.com/office/powerpoint/2010/main" val="3638723402"/>
+      </p:ext>
+    </p:extLst>
+  </p:cSld>
+  <p:clrMapOvr>
+    <a:masterClrMapping/>
+  </p:clrMapOvr>
+</p:notes>
+</file>
+
+<file path=ppt/notesSlides/notesSlide2.xml><?xml version="1.0" encoding="utf-8"?>
+<p:notes xmlns:a="http://schemas.openxmlformats.org/drawingml/2006/main" xmlns:r="http://schemas.openxmlformats.org/officeDocument/2006/relationships" xmlns:p="http://schemas.openxmlformats.org/presentationml/2006/main">
+  <p:cSld>
+    <p:spTree>
+      <p:nvGrpSpPr>
+        <p:cNvPr id="1" name=""/>
+        <p:cNvGrpSpPr/>
+        <p:nvPr/>
+      </p:nvGrpSpPr>
+      <p:grpSpPr>
+        <a:xfrm>
+          <a:off x="0" y="0"/>
+          <a:ext cx="0" cy="0"/>
+          <a:chOff x="0" y="0"/>
+          <a:chExt cx="0" cy="0"/>
+        </a:xfrm>
+      </p:grpSpPr>
+      <p:sp>
+        <p:nvSpPr>
+          <p:cNvPr id="2" name="Slide Image Placeholder 1"/>
+          <p:cNvSpPr>
+            <a:spLocks noGrp="1" noRot="1" noChangeAspect="1"/>
+          </p:cNvSpPr>
+          <p:nvPr>
+            <p:ph type="sldImg"/>
+          </p:nvPr>
+        </p:nvSpPr>
+        <p:spPr/>
+      </p:sp>
+      <p:sp>
+        <p:nvSpPr>
+          <p:cNvPr id="3" name="Notes Placeholder 2"/>
+          <p:cNvSpPr>
+            <a:spLocks noGrp="1"/>
+          </p:cNvSpPr>
+          <p:nvPr>
+            <p:ph type="body" idx="1"/>
+          </p:nvPr>
+        </p:nvSpPr>
+        <p:spPr/>
+        <p:txBody>
+          <a:bodyPr/>
+          <a:lstStyle/>
+          <a:p>
+            <a:pPr marL="0" indent="0">
+              <a:buFontTx/>
+              <a:buNone/>
+            </a:pPr>
+            <a:r>
+              <a:rPr lang="en-GB" dirty="0"/>
+              <a:t>550.000 individuals in the dataset, 16.000 unique death causes</a:t>
+            </a:r>
+          </a:p>
+          <a:p>
+            <a:pPr marL="171450" indent="-171450">
+              <a:buFontTx/>
+              <a:buChar char="-"/>
+            </a:pPr>
+            <a:endParaRPr lang="en-GB" dirty="0"/>
+          </a:p>
+          <a:p>
+            <a:r>
+              <a:rPr lang="en-GB" dirty="0"/>
+              <a:t>76% have been hand-coded, which covers around 30% of the individual cases.</a:t>
+            </a:r>
+          </a:p>
+          <a:p>
+            <a:endParaRPr lang="en-GB" dirty="0"/>
+          </a:p>
+          <a:p>
+            <a:r>
+              <a:rPr lang="en-GB" dirty="0"/>
+              <a:t>To study how model precisions evolve, we created a subset using only classified causes of death, simulating a 100% classified dataset</a:t>
+            </a:r>
+          </a:p>
+          <a:p>
+            <a:endParaRPr lang="en-GB" dirty="0"/>
+          </a:p>
+          <a:p>
+            <a:r>
+              <a:rPr lang="en-GB" dirty="0"/>
+              <a:t>Accurate prediction is the model hitting ICD10h *block*</a:t>
+            </a:r>
+          </a:p>
+          <a:p>
+            <a:endParaRPr lang="en-GB" dirty="0"/>
+          </a:p>
+          <a:p>
+            <a:endParaRPr lang="en-GB" dirty="0"/>
+          </a:p>
+          <a:p>
+            <a:r>
+              <a:rPr lang="en-GB" dirty="0"/>
+              <a:t>*We are asking how much data is needed to be coded so a ML model can do the rest?</a:t>
+            </a:r>
+            <a:endParaRPr lang="en-DK" dirty="0"/>
+          </a:p>
+        </p:txBody>
+      </p:sp>
+      <p:sp>
+        <p:nvSpPr>
+          <p:cNvPr id="4" name="Slide Number Placeholder 3"/>
+          <p:cNvSpPr>
+            <a:spLocks noGrp="1"/>
+          </p:cNvSpPr>
+          <p:nvPr>
+            <p:ph type="sldNum" sz="quarter" idx="5"/>
+          </p:nvPr>
+        </p:nvSpPr>
+        <p:spPr/>
+        <p:txBody>
+          <a:bodyPr/>
+          <a:lstStyle/>
+          <a:p>
+            <a:fld id="{7C9C0BC2-923C-498A-9FC1-46FB3490DD7A}" type="slidenum">
+              <a:rPr lang="en-DK" smtClean="0"/>
+              <a:t>3</a:t>
+            </a:fld>
+            <a:endParaRPr lang="en-DK"/>
+          </a:p>
+        </p:txBody>
+      </p:sp>
+    </p:spTree>
+    <p:extLst>
+      <p:ext uri="{BB962C8B-B14F-4D97-AF65-F5344CB8AC3E}">
+        <p14:creationId xmlns:p14="http://schemas.microsoft.com/office/powerpoint/2010/main" val="284062141"/>
+      </p:ext>
+    </p:extLst>
+  </p:cSld>
+  <p:clrMapOvr>
+    <a:masterClrMapping/>
+  </p:clrMapOvr>
+</p:notes>
+</file>
+
+<file path=ppt/notesSlides/notesSlide3.xml><?xml version="1.0" encoding="utf-8"?>
+<p:notes xmlns:a="http://schemas.openxmlformats.org/drawingml/2006/main" xmlns:r="http://schemas.openxmlformats.org/officeDocument/2006/relationships" xmlns:p="http://schemas.openxmlformats.org/presentationml/2006/main">
+  <p:cSld>
+    <p:spTree>
+      <p:nvGrpSpPr>
+        <p:cNvPr id="1" name=""/>
+        <p:cNvGrpSpPr/>
+        <p:nvPr/>
+      </p:nvGrpSpPr>
+      <p:grpSpPr>
+        <a:xfrm>
+          <a:off x="0" y="0"/>
+          <a:ext cx="0" cy="0"/>
+          <a:chOff x="0" y="0"/>
+          <a:chExt cx="0" cy="0"/>
+        </a:xfrm>
+      </p:grpSpPr>
+      <p:sp>
+        <p:nvSpPr>
+          <p:cNvPr id="2" name="Slide Image Placeholder 1"/>
+          <p:cNvSpPr>
+            <a:spLocks noGrp="1" noRot="1" noChangeAspect="1"/>
+          </p:cNvSpPr>
+          <p:nvPr>
+            <p:ph type="sldImg"/>
+          </p:nvPr>
+        </p:nvSpPr>
+        <p:spPr/>
+      </p:sp>
+      <p:sp>
+        <p:nvSpPr>
+          <p:cNvPr id="3" name="Notes Placeholder 2"/>
+          <p:cNvSpPr>
+            <a:spLocks noGrp="1"/>
+          </p:cNvSpPr>
+          <p:nvPr>
+            <p:ph type="body" idx="1"/>
+          </p:nvPr>
+        </p:nvSpPr>
+        <p:spPr/>
+        <p:txBody>
+          <a:bodyPr/>
+          <a:lstStyle/>
+          <a:p>
+            <a:r>
+              <a:rPr lang="en-GB" dirty="0"/>
+              <a:t>The way you select cause-of-deaths to classify matters.</a:t>
+            </a:r>
+          </a:p>
+          <a:p>
+            <a:endParaRPr lang="en-GB" dirty="0"/>
+          </a:p>
+          <a:p>
+            <a:r>
+              <a:rPr lang="en-GB" dirty="0"/>
+              <a:t>Two main ways of doing it:</a:t>
+            </a:r>
+          </a:p>
+          <a:p>
+            <a:pPr marL="228600" indent="-228600">
+              <a:buAutoNum type="arabicPeriod"/>
+            </a:pPr>
+            <a:r>
+              <a:rPr lang="en-GB" dirty="0"/>
+              <a:t>top-down, ordering by most to least frequent, and classifying from the top.</a:t>
+            </a:r>
+          </a:p>
+          <a:p>
+            <a:pPr marL="228600" indent="-228600">
+              <a:buAutoNum type="arabicPeriod"/>
+            </a:pPr>
+            <a:r>
+              <a:rPr lang="en-GB" dirty="0"/>
+              <a:t>randomly selecting from the dataset</a:t>
+            </a:r>
+          </a:p>
+          <a:p>
+            <a:pPr marL="228600" indent="-228600">
+              <a:buAutoNum type="arabicPeriod"/>
+            </a:pPr>
+            <a:endParaRPr lang="en-GB" dirty="0"/>
+          </a:p>
+          <a:p>
+            <a:pPr marL="0" indent="0">
+              <a:buNone/>
+            </a:pPr>
+            <a:r>
+              <a:rPr lang="en-GB" dirty="0"/>
+              <a:t>Look at the figure, </a:t>
+            </a:r>
+          </a:p>
+          <a:p>
+            <a:pPr marL="0" indent="0">
+              <a:buNone/>
+            </a:pPr>
+            <a:r>
+              <a:rPr lang="en-GB" dirty="0"/>
+              <a:t>x-axis is % of dataset</a:t>
+            </a:r>
+          </a:p>
+          <a:p>
+            <a:pPr marL="0" indent="0">
+              <a:buNone/>
+            </a:pPr>
+            <a:r>
+              <a:rPr lang="en-GB" dirty="0"/>
+              <a:t>y-axis is model accuracy (on a test-set)</a:t>
+            </a:r>
+          </a:p>
+          <a:p>
+            <a:pPr marL="0" indent="0">
+              <a:buNone/>
+            </a:pPr>
+            <a:endParaRPr lang="en-GB" dirty="0"/>
+          </a:p>
+          <a:p>
+            <a:pPr marL="0" indent="0">
+              <a:buNone/>
+            </a:pPr>
+            <a:r>
+              <a:rPr lang="en-GB" dirty="0"/>
+              <a:t>Random selection is better</a:t>
+            </a:r>
+          </a:p>
+          <a:p>
+            <a:pPr marL="0" indent="0">
+              <a:buNone/>
+            </a:pPr>
+            <a:endParaRPr lang="en-GB" dirty="0"/>
           </a:p>
         </p:txBody>
       </p:sp>
@@ -545,6 +871,321 @@
     <p:extLst>
       <p:ext uri="{BB962C8B-B14F-4D97-AF65-F5344CB8AC3E}">
         <p14:creationId xmlns:p14="http://schemas.microsoft.com/office/powerpoint/2010/main" val="1335425840"/>
+      </p:ext>
+    </p:extLst>
+  </p:cSld>
+  <p:clrMapOvr>
+    <a:masterClrMapping/>
+  </p:clrMapOvr>
+</p:notes>
+</file>
+
+<file path=ppt/notesSlides/notesSlide4.xml><?xml version="1.0" encoding="utf-8"?>
+<p:notes xmlns:a="http://schemas.openxmlformats.org/drawingml/2006/main" xmlns:r="http://schemas.openxmlformats.org/officeDocument/2006/relationships" xmlns:p="http://schemas.openxmlformats.org/presentationml/2006/main">
+  <p:cSld>
+    <p:spTree>
+      <p:nvGrpSpPr>
+        <p:cNvPr id="1" name="">
+          <a:extLst>
+            <a:ext uri="{FF2B5EF4-FFF2-40B4-BE49-F238E27FC236}">
+              <a16:creationId xmlns:a16="http://schemas.microsoft.com/office/drawing/2014/main" id="{DC5E1583-57A5-D5D1-DACF-78D700D89CA9}"/>
+            </a:ext>
+          </a:extLst>
+        </p:cNvPr>
+        <p:cNvGrpSpPr/>
+        <p:nvPr/>
+      </p:nvGrpSpPr>
+      <p:grpSpPr>
+        <a:xfrm>
+          <a:off x="0" y="0"/>
+          <a:ext cx="0" cy="0"/>
+          <a:chOff x="0" y="0"/>
+          <a:chExt cx="0" cy="0"/>
+        </a:xfrm>
+      </p:grpSpPr>
+      <p:sp>
+        <p:nvSpPr>
+          <p:cNvPr id="2" name="Slide Image Placeholder 1">
+            <a:extLst>
+              <a:ext uri="{FF2B5EF4-FFF2-40B4-BE49-F238E27FC236}">
+                <a16:creationId xmlns:a16="http://schemas.microsoft.com/office/drawing/2014/main" id="{175357A3-F24D-931B-93FB-F1A16854E533}"/>
+              </a:ext>
+            </a:extLst>
+          </p:cNvPr>
+          <p:cNvSpPr>
+            <a:spLocks noGrp="1" noRot="1" noChangeAspect="1"/>
+          </p:cNvSpPr>
+          <p:nvPr>
+            <p:ph type="sldImg"/>
+          </p:nvPr>
+        </p:nvSpPr>
+        <p:spPr/>
+      </p:sp>
+      <p:sp>
+        <p:nvSpPr>
+          <p:cNvPr id="3" name="Notes Placeholder 2">
+            <a:extLst>
+              <a:ext uri="{FF2B5EF4-FFF2-40B4-BE49-F238E27FC236}">
+                <a16:creationId xmlns:a16="http://schemas.microsoft.com/office/drawing/2014/main" id="{29BBF3F3-571F-735E-EB13-EA1E4D1F9EE6}"/>
+              </a:ext>
+            </a:extLst>
+          </p:cNvPr>
+          <p:cNvSpPr>
+            <a:spLocks noGrp="1"/>
+          </p:cNvSpPr>
+          <p:nvPr>
+            <p:ph type="body" idx="1"/>
+          </p:nvPr>
+        </p:nvSpPr>
+        <p:spPr/>
+        <p:txBody>
+          <a:bodyPr/>
+          <a:lstStyle/>
+          <a:p>
+            <a:r>
+              <a:rPr lang="en-GB" dirty="0"/>
+              <a:t>There’s a third option for selecting how you classify causes of death: active learning, machine learning technique</a:t>
+            </a:r>
+          </a:p>
+          <a:p>
+            <a:endParaRPr lang="en-GB" dirty="0"/>
+          </a:p>
+          <a:p>
+            <a:r>
+              <a:rPr lang="en-GB" dirty="0"/>
+              <a:t>The method allows you to be part of the training process, getting feedback from the model along the way</a:t>
+            </a:r>
+          </a:p>
+          <a:p>
+            <a:endParaRPr lang="en-GB" dirty="0"/>
+          </a:p>
+          <a:p>
+            <a:endParaRPr lang="en-GB" dirty="0"/>
+          </a:p>
+          <a:p>
+            <a:r>
+              <a:rPr lang="en-GB" dirty="0"/>
+              <a:t>Initially, you have a classified set (either top-down or randomly). Here 10%.</a:t>
+            </a:r>
+          </a:p>
+          <a:p>
+            <a:endParaRPr lang="en-GB" dirty="0"/>
+          </a:p>
+          <a:p>
+            <a:r>
+              <a:rPr lang="en-GB" dirty="0"/>
+              <a:t>Here, model tells you which unclassified causes of death it’s most uncertain about</a:t>
+            </a:r>
+          </a:p>
+          <a:p>
+            <a:endParaRPr lang="en-GB" dirty="0"/>
+          </a:p>
+          <a:p>
+            <a:r>
+              <a:rPr lang="en-GB" dirty="0"/>
+              <a:t>These are the causes which you must classify, as the model gains most from them</a:t>
+            </a:r>
+          </a:p>
+          <a:p>
+            <a:endParaRPr lang="en-GB" dirty="0"/>
+          </a:p>
+          <a:p>
+            <a:r>
+              <a:rPr lang="en-GB" dirty="0"/>
+              <a:t>Then you add them to the classified dataset and train a new model using this – model gives uncertainty, and this loop continues.</a:t>
+            </a:r>
+          </a:p>
+        </p:txBody>
+      </p:sp>
+      <p:sp>
+        <p:nvSpPr>
+          <p:cNvPr id="4" name="Slide Number Placeholder 3">
+            <a:extLst>
+              <a:ext uri="{FF2B5EF4-FFF2-40B4-BE49-F238E27FC236}">
+                <a16:creationId xmlns:a16="http://schemas.microsoft.com/office/drawing/2014/main" id="{1BF49003-21A9-6CBC-2B67-F4D3E58DA123}"/>
+              </a:ext>
+            </a:extLst>
+          </p:cNvPr>
+          <p:cNvSpPr>
+            <a:spLocks noGrp="1"/>
+          </p:cNvSpPr>
+          <p:nvPr>
+            <p:ph type="sldNum" sz="quarter" idx="5"/>
+          </p:nvPr>
+        </p:nvSpPr>
+        <p:spPr/>
+        <p:txBody>
+          <a:bodyPr/>
+          <a:lstStyle/>
+          <a:p>
+            <a:fld id="{7C9C0BC2-923C-498A-9FC1-46FB3490DD7A}" type="slidenum">
+              <a:rPr lang="en-DK" smtClean="0"/>
+              <a:t>5</a:t>
+            </a:fld>
+            <a:endParaRPr lang="en-DK"/>
+          </a:p>
+        </p:txBody>
+      </p:sp>
+    </p:spTree>
+    <p:extLst>
+      <p:ext uri="{BB962C8B-B14F-4D97-AF65-F5344CB8AC3E}">
+        <p14:creationId xmlns:p14="http://schemas.microsoft.com/office/powerpoint/2010/main" val="3593932675"/>
+      </p:ext>
+    </p:extLst>
+  </p:cSld>
+  <p:clrMapOvr>
+    <a:masterClrMapping/>
+  </p:clrMapOvr>
+</p:notes>
+</file>
+
+<file path=ppt/notesSlides/notesSlide5.xml><?xml version="1.0" encoding="utf-8"?>
+<p:notes xmlns:a="http://schemas.openxmlformats.org/drawingml/2006/main" xmlns:r="http://schemas.openxmlformats.org/officeDocument/2006/relationships" xmlns:p="http://schemas.openxmlformats.org/presentationml/2006/main">
+  <p:cSld>
+    <p:spTree>
+      <p:nvGrpSpPr>
+        <p:cNvPr id="1" name="">
+          <a:extLst>
+            <a:ext uri="{FF2B5EF4-FFF2-40B4-BE49-F238E27FC236}">
+              <a16:creationId xmlns:a16="http://schemas.microsoft.com/office/drawing/2014/main" id="{BA9CBF76-4CC6-49C3-52ED-B61D794DC7D3}"/>
+            </a:ext>
+          </a:extLst>
+        </p:cNvPr>
+        <p:cNvGrpSpPr/>
+        <p:nvPr/>
+      </p:nvGrpSpPr>
+      <p:grpSpPr>
+        <a:xfrm>
+          <a:off x="0" y="0"/>
+          <a:ext cx="0" cy="0"/>
+          <a:chOff x="0" y="0"/>
+          <a:chExt cx="0" cy="0"/>
+        </a:xfrm>
+      </p:grpSpPr>
+      <p:sp>
+        <p:nvSpPr>
+          <p:cNvPr id="2" name="Slide Image Placeholder 1">
+            <a:extLst>
+              <a:ext uri="{FF2B5EF4-FFF2-40B4-BE49-F238E27FC236}">
+                <a16:creationId xmlns:a16="http://schemas.microsoft.com/office/drawing/2014/main" id="{2B43F80D-BEB3-CFE6-CADE-B9E9DFD05708}"/>
+              </a:ext>
+            </a:extLst>
+          </p:cNvPr>
+          <p:cNvSpPr>
+            <a:spLocks noGrp="1" noRot="1" noChangeAspect="1"/>
+          </p:cNvSpPr>
+          <p:nvPr>
+            <p:ph type="sldImg"/>
+          </p:nvPr>
+        </p:nvSpPr>
+        <p:spPr/>
+      </p:sp>
+      <p:sp>
+        <p:nvSpPr>
+          <p:cNvPr id="3" name="Notes Placeholder 2">
+            <a:extLst>
+              <a:ext uri="{FF2B5EF4-FFF2-40B4-BE49-F238E27FC236}">
+                <a16:creationId xmlns:a16="http://schemas.microsoft.com/office/drawing/2014/main" id="{4287A727-0FEA-7DD5-7EE2-AE3680A61B00}"/>
+              </a:ext>
+            </a:extLst>
+          </p:cNvPr>
+          <p:cNvSpPr>
+            <a:spLocks noGrp="1"/>
+          </p:cNvSpPr>
+          <p:nvPr>
+            <p:ph type="body" idx="1"/>
+          </p:nvPr>
+        </p:nvSpPr>
+        <p:spPr/>
+        <p:txBody>
+          <a:bodyPr/>
+          <a:lstStyle/>
+          <a:p>
+            <a:r>
+              <a:rPr lang="en-GB" dirty="0"/>
+              <a:t>Random selection &gt; top down</a:t>
+            </a:r>
+          </a:p>
+          <a:p>
+            <a:endParaRPr lang="en-GB" dirty="0"/>
+          </a:p>
+          <a:p>
+            <a:r>
+              <a:rPr lang="en-GB" dirty="0"/>
+              <a:t>Active learning outperforms passive learning, but both will eventually converge</a:t>
+            </a:r>
+          </a:p>
+          <a:p>
+            <a:endParaRPr lang="en-GB" dirty="0"/>
+          </a:p>
+          <a:p>
+            <a:r>
+              <a:rPr lang="en-GB" dirty="0"/>
+              <a:t>Active learning &gt; random selection</a:t>
+            </a:r>
+          </a:p>
+          <a:p>
+            <a:endParaRPr lang="en-GB" dirty="0"/>
+          </a:p>
+          <a:p>
+            <a:r>
+              <a:rPr lang="en-GB" dirty="0"/>
+              <a:t>Detailed datasets that provide context is great for machine learning</a:t>
+            </a:r>
+          </a:p>
+          <a:p>
+            <a:endParaRPr lang="en-GB" dirty="0"/>
+          </a:p>
+          <a:p>
+            <a:endParaRPr lang="en-GB" dirty="0"/>
+          </a:p>
+          <a:p>
+            <a:endParaRPr lang="en-GB" dirty="0"/>
+          </a:p>
+          <a:p>
+            <a:endParaRPr lang="en-GB" dirty="0"/>
+          </a:p>
+          <a:p>
+            <a:endParaRPr lang="en-GB" dirty="0"/>
+          </a:p>
+          <a:p>
+            <a:endParaRPr lang="en-DK" dirty="0"/>
+          </a:p>
+        </p:txBody>
+      </p:sp>
+      <p:sp>
+        <p:nvSpPr>
+          <p:cNvPr id="4" name="Slide Number Placeholder 3">
+            <a:extLst>
+              <a:ext uri="{FF2B5EF4-FFF2-40B4-BE49-F238E27FC236}">
+                <a16:creationId xmlns:a16="http://schemas.microsoft.com/office/drawing/2014/main" id="{8E2B9FB9-BCC3-503E-7E03-C3C763661971}"/>
+              </a:ext>
+            </a:extLst>
+          </p:cNvPr>
+          <p:cNvSpPr>
+            <a:spLocks noGrp="1"/>
+          </p:cNvSpPr>
+          <p:nvPr>
+            <p:ph type="sldNum" sz="quarter" idx="5"/>
+          </p:nvPr>
+        </p:nvSpPr>
+        <p:spPr/>
+        <p:txBody>
+          <a:bodyPr/>
+          <a:lstStyle/>
+          <a:p>
+            <a:fld id="{7C9C0BC2-923C-498A-9FC1-46FB3490DD7A}" type="slidenum">
+              <a:rPr lang="en-DK" smtClean="0"/>
+              <a:t>6</a:t>
+            </a:fld>
+            <a:endParaRPr lang="en-DK"/>
+          </a:p>
+        </p:txBody>
+      </p:sp>
+    </p:spTree>
+    <p:extLst>
+      <p:ext uri="{BB962C8B-B14F-4D97-AF65-F5344CB8AC3E}">
+        <p14:creationId xmlns:p14="http://schemas.microsoft.com/office/powerpoint/2010/main" val="4203690702"/>
       </p:ext>
     </p:extLst>
   </p:cSld>
@@ -703,7 +1344,7 @@
           <a:p>
             <a:fld id="{3CCE14DF-A9FB-428A-80D1-4AE1368EB34C}" type="datetimeFigureOut">
               <a:rPr lang="en-DK" smtClean="0"/>
-              <a:t>04/09/2025</a:t>
+              <a:t>10/09/2025</a:t>
             </a:fld>
             <a:endParaRPr lang="en-DK"/>
           </a:p>
@@ -950,7 +1591,7 @@
           <a:p>
             <a:fld id="{3CCE14DF-A9FB-428A-80D1-4AE1368EB34C}" type="datetimeFigureOut">
               <a:rPr lang="en-DK" smtClean="0"/>
-              <a:t>04/09/2025</a:t>
+              <a:t>10/09/2025</a:t>
             </a:fld>
             <a:endParaRPr lang="en-DK"/>
           </a:p>
@@ -1160,7 +1801,7 @@
           <a:p>
             <a:fld id="{3CCE14DF-A9FB-428A-80D1-4AE1368EB34C}" type="datetimeFigureOut">
               <a:rPr lang="en-DK" smtClean="0"/>
-              <a:t>04/09/2025</a:t>
+              <a:t>10/09/2025</a:t>
             </a:fld>
             <a:endParaRPr lang="en-DK"/>
           </a:p>
@@ -1382,7 +2023,7 @@
           <a:p>
             <a:fld id="{CA7A2A7E-2FCB-4CA4-BB3C-C258202DAB1B}" type="datetimeFigureOut">
               <a:rPr lang="en-DK" smtClean="0"/>
-              <a:t>04/09/2025</a:t>
+              <a:t>10/09/2025</a:t>
             </a:fld>
             <a:endParaRPr lang="en-DK"/>
           </a:p>
@@ -1582,7 +2223,7 @@
           <a:p>
             <a:fld id="{CA7A2A7E-2FCB-4CA4-BB3C-C258202DAB1B}" type="datetimeFigureOut">
               <a:rPr lang="en-DK" smtClean="0"/>
-              <a:t>04/09/2025</a:t>
+              <a:t>10/09/2025</a:t>
             </a:fld>
             <a:endParaRPr lang="en-DK"/>
           </a:p>
@@ -1858,7 +2499,7 @@
           <a:p>
             <a:fld id="{CA7A2A7E-2FCB-4CA4-BB3C-C258202DAB1B}" type="datetimeFigureOut">
               <a:rPr lang="en-DK" smtClean="0"/>
-              <a:t>04/09/2025</a:t>
+              <a:t>10/09/2025</a:t>
             </a:fld>
             <a:endParaRPr lang="en-DK"/>
           </a:p>
@@ -2126,7 +2767,7 @@
           <a:p>
             <a:fld id="{CA7A2A7E-2FCB-4CA4-BB3C-C258202DAB1B}" type="datetimeFigureOut">
               <a:rPr lang="en-DK" smtClean="0"/>
-              <a:t>04/09/2025</a:t>
+              <a:t>10/09/2025</a:t>
             </a:fld>
             <a:endParaRPr lang="en-DK"/>
           </a:p>
@@ -2541,7 +3182,7 @@
           <a:p>
             <a:fld id="{CA7A2A7E-2FCB-4CA4-BB3C-C258202DAB1B}" type="datetimeFigureOut">
               <a:rPr lang="en-DK" smtClean="0"/>
-              <a:t>04/09/2025</a:t>
+              <a:t>10/09/2025</a:t>
             </a:fld>
             <a:endParaRPr lang="en-DK"/>
           </a:p>
@@ -2683,7 +3324,7 @@
           <a:p>
             <a:fld id="{CA7A2A7E-2FCB-4CA4-BB3C-C258202DAB1B}" type="datetimeFigureOut">
               <a:rPr lang="en-DK" smtClean="0"/>
-              <a:t>04/09/2025</a:t>
+              <a:t>10/09/2025</a:t>
             </a:fld>
             <a:endParaRPr lang="en-DK"/>
           </a:p>
@@ -2796,7 +3437,7 @@
           <a:p>
             <a:fld id="{CA7A2A7E-2FCB-4CA4-BB3C-C258202DAB1B}" type="datetimeFigureOut">
               <a:rPr lang="en-DK" smtClean="0"/>
-              <a:t>04/09/2025</a:t>
+              <a:t>10/09/2025</a:t>
             </a:fld>
             <a:endParaRPr lang="en-DK"/>
           </a:p>
@@ -3109,7 +3750,7 @@
           <a:p>
             <a:fld id="{CA7A2A7E-2FCB-4CA4-BB3C-C258202DAB1B}" type="datetimeFigureOut">
               <a:rPr lang="en-DK" smtClean="0"/>
-              <a:t>04/09/2025</a:t>
+              <a:t>10/09/2025</a:t>
             </a:fld>
             <a:endParaRPr lang="en-DK"/>
           </a:p>
@@ -3309,7 +3950,7 @@
           <a:p>
             <a:fld id="{3CCE14DF-A9FB-428A-80D1-4AE1368EB34C}" type="datetimeFigureOut">
               <a:rPr lang="en-DK" smtClean="0"/>
-              <a:t>04/09/2025</a:t>
+              <a:t>10/09/2025</a:t>
             </a:fld>
             <a:endParaRPr lang="en-DK"/>
           </a:p>
@@ -3598,7 +4239,7 @@
           <a:p>
             <a:fld id="{CA7A2A7E-2FCB-4CA4-BB3C-C258202DAB1B}" type="datetimeFigureOut">
               <a:rPr lang="en-DK" smtClean="0"/>
-              <a:t>04/09/2025</a:t>
+              <a:t>10/09/2025</a:t>
             </a:fld>
             <a:endParaRPr lang="en-DK"/>
           </a:p>
@@ -3798,7 +4439,7 @@
           <a:p>
             <a:fld id="{CA7A2A7E-2FCB-4CA4-BB3C-C258202DAB1B}" type="datetimeFigureOut">
               <a:rPr lang="en-DK" smtClean="0"/>
-              <a:t>04/09/2025</a:t>
+              <a:t>10/09/2025</a:t>
             </a:fld>
             <a:endParaRPr lang="en-DK"/>
           </a:p>
@@ -4008,7 +4649,7 @@
           <a:p>
             <a:fld id="{CA7A2A7E-2FCB-4CA4-BB3C-C258202DAB1B}" type="datetimeFigureOut">
               <a:rPr lang="en-DK" smtClean="0"/>
-              <a:t>04/09/2025</a:t>
+              <a:t>10/09/2025</a:t>
             </a:fld>
             <a:endParaRPr lang="en-DK"/>
           </a:p>
@@ -4284,7 +4925,7 @@
           <a:p>
             <a:fld id="{3CCE14DF-A9FB-428A-80D1-4AE1368EB34C}" type="datetimeFigureOut">
               <a:rPr lang="en-DK" smtClean="0"/>
-              <a:t>04/09/2025</a:t>
+              <a:t>10/09/2025</a:t>
             </a:fld>
             <a:endParaRPr lang="en-DK"/>
           </a:p>
@@ -4552,7 +5193,7 @@
           <a:p>
             <a:fld id="{3CCE14DF-A9FB-428A-80D1-4AE1368EB34C}" type="datetimeFigureOut">
               <a:rPr lang="en-DK" smtClean="0"/>
-              <a:t>04/09/2025</a:t>
+              <a:t>10/09/2025</a:t>
             </a:fld>
             <a:endParaRPr lang="en-DK"/>
           </a:p>
@@ -4967,7 +5608,7 @@
           <a:p>
             <a:fld id="{3CCE14DF-A9FB-428A-80D1-4AE1368EB34C}" type="datetimeFigureOut">
               <a:rPr lang="en-DK" smtClean="0"/>
-              <a:t>04/09/2025</a:t>
+              <a:t>10/09/2025</a:t>
             </a:fld>
             <a:endParaRPr lang="en-DK"/>
           </a:p>
@@ -5109,7 +5750,7 @@
           <a:p>
             <a:fld id="{3CCE14DF-A9FB-428A-80D1-4AE1368EB34C}" type="datetimeFigureOut">
               <a:rPr lang="en-DK" smtClean="0"/>
-              <a:t>04/09/2025</a:t>
+              <a:t>10/09/2025</a:t>
             </a:fld>
             <a:endParaRPr lang="en-DK"/>
           </a:p>
@@ -5222,7 +5863,7 @@
           <a:p>
             <a:fld id="{3CCE14DF-A9FB-428A-80D1-4AE1368EB34C}" type="datetimeFigureOut">
               <a:rPr lang="en-DK" smtClean="0"/>
-              <a:t>04/09/2025</a:t>
+              <a:t>10/09/2025</a:t>
             </a:fld>
             <a:endParaRPr lang="en-DK"/>
           </a:p>
@@ -5535,7 +6176,7 @@
           <a:p>
             <a:fld id="{3CCE14DF-A9FB-428A-80D1-4AE1368EB34C}" type="datetimeFigureOut">
               <a:rPr lang="en-DK" smtClean="0"/>
-              <a:t>04/09/2025</a:t>
+              <a:t>10/09/2025</a:t>
             </a:fld>
             <a:endParaRPr lang="en-DK"/>
           </a:p>
@@ -5824,7 +6465,7 @@
           <a:p>
             <a:fld id="{3CCE14DF-A9FB-428A-80D1-4AE1368EB34C}" type="datetimeFigureOut">
               <a:rPr lang="en-DK" smtClean="0"/>
-              <a:t>04/09/2025</a:t>
+              <a:t>10/09/2025</a:t>
             </a:fld>
             <a:endParaRPr lang="en-DK"/>
           </a:p>
@@ -6067,7 +6708,7 @@
           <a:p>
             <a:fld id="{3CCE14DF-A9FB-428A-80D1-4AE1368EB34C}" type="datetimeFigureOut">
               <a:rPr lang="en-DK" smtClean="0"/>
-              <a:t>04/09/2025</a:t>
+              <a:t>10/09/2025</a:t>
             </a:fld>
             <a:endParaRPr lang="en-DK"/>
           </a:p>
@@ -6684,7 +7325,7 @@
           <a:p>
             <a:fld id="{CA7A2A7E-2FCB-4CA4-BB3C-C258202DAB1B}" type="datetimeFigureOut">
               <a:rPr lang="en-DK" smtClean="0"/>
-              <a:t>04/09/2025</a:t>
+              <a:t>10/09/2025</a:t>
             </a:fld>
             <a:endParaRPr lang="en-DK"/>
           </a:p>
@@ -7167,8 +7808,8 @@
         </p:blipFill>
         <p:spPr bwMode="auto">
           <a:xfrm>
-            <a:off x="952500" y="0"/>
-            <a:ext cx="10287000" cy="6858000"/>
+            <a:off x="952500" y="-87549"/>
+            <a:ext cx="9635247" cy="6423498"/>
           </a:xfrm>
           <a:prstGeom prst="rect">
             <a:avLst/>
@@ -7201,7 +7842,7 @@
         </p:nvSpPr>
         <p:spPr>
           <a:xfrm>
-            <a:off x="952500" y="5142971"/>
+            <a:off x="872720" y="5038038"/>
             <a:ext cx="9144000" cy="1655762"/>
           </a:xfrm>
           <a:prstGeom prst="rect">
@@ -7424,11 +8065,56 @@
               <a:rPr lang="en-GB" dirty="0">
                 <a:latin typeface="Bahnschrift Light Condensed" panose="020B0502040204020203" pitchFamily="34" charset="0"/>
               </a:rPr>
-              <a:t>Roskilde University Denmark</a:t>
-            </a:r>
-          </a:p>
-        </p:txBody>
-      </p:sp>
+              <a:t>Roskilde University, Denmark</a:t>
+            </a:r>
+          </a:p>
+        </p:txBody>
+      </p:sp>
+      <p:pic>
+        <p:nvPicPr>
+          <p:cNvPr id="1026" name="Picture 2" descr="Danmarks Grundforskningsfond / Danish National Research Foundation">
+            <a:extLst>
+              <a:ext uri="{FF2B5EF4-FFF2-40B4-BE49-F238E27FC236}">
+                <a16:creationId xmlns:a16="http://schemas.microsoft.com/office/drawing/2014/main" id="{AC8BFE7C-4C98-F6CC-9893-52E3B1BCBD7D}"/>
+              </a:ext>
+            </a:extLst>
+          </p:cNvPr>
+          <p:cNvPicPr>
+            <a:picLocks noChangeAspect="1" noChangeArrowheads="1"/>
+          </p:cNvPicPr>
+          <p:nvPr/>
+        </p:nvPicPr>
+        <p:blipFill rotWithShape="1">
+          <a:blip r:embed="rId4">
+            <a:extLst>
+              <a:ext uri="{28A0092B-C50C-407E-A947-70E740481C1C}">
+                <a14:useLocalDpi xmlns:a14="http://schemas.microsoft.com/office/drawing/2010/main" val="0"/>
+              </a:ext>
+            </a:extLst>
+          </a:blip>
+          <a:srcRect l="5726" t="16946" r="5825" b="21225"/>
+          <a:stretch/>
+        </p:blipFill>
+        <p:spPr bwMode="auto">
+          <a:xfrm>
+            <a:off x="10252954" y="5818311"/>
+            <a:ext cx="1815830" cy="875489"/>
+          </a:xfrm>
+          <a:prstGeom prst="rect">
+            <a:avLst/>
+          </a:prstGeom>
+          <a:noFill/>
+          <a:extLst>
+            <a:ext uri="{909E8E84-426E-40DD-AFC4-6F175D3DCCD1}">
+              <a14:hiddenFill xmlns:a14="http://schemas.microsoft.com/office/drawing/2010/main">
+                <a:solidFill>
+                  <a:srgbClr val="FFFFFF"/>
+                </a:solidFill>
+              </a14:hiddenFill>
+            </a:ext>
+          </a:extLst>
+        </p:spPr>
+      </p:pic>
     </p:spTree>
     <p:extLst>
       <p:ext uri="{BB962C8B-B14F-4D97-AF65-F5344CB8AC3E}">
@@ -7482,7 +8168,7 @@
           <a:p>
             <a:r>
               <a:rPr lang="en-GB" dirty="0"/>
-              <a:t>Why?</a:t>
+              <a:t>Motivation</a:t>
             </a:r>
             <a:endParaRPr lang="en-DK" dirty="0"/>
           </a:p>
@@ -7506,32 +8192,40 @@
         </p:nvSpPr>
         <p:spPr/>
         <p:txBody>
-          <a:bodyPr/>
-          <a:lstStyle/>
-          <a:p>
-            <a:r>
-              <a:rPr lang="en-GB" dirty="0"/>
-              <a:t>Vast amounts of data has become available recently</a:t>
-            </a:r>
-          </a:p>
-          <a:p>
-            <a:r>
-              <a:rPr lang="en-GB" dirty="0"/>
-              <a:t>It’s time-consuming to classify cause-of-death data…</a:t>
-            </a:r>
-          </a:p>
-          <a:p>
-            <a:r>
-              <a:rPr lang="en-GB" dirty="0"/>
-              <a:t>Machine Learning methods can </a:t>
-            </a:r>
-            <a:r>
-              <a:rPr lang="en-GB" b="1" dirty="0"/>
-              <a:t>save you LOTS of time</a:t>
-            </a:r>
-            <a:r>
-              <a:rPr lang="en-GB" dirty="0"/>
-              <a:t>!</a:t>
+          <a:bodyPr>
+            <a:normAutofit/>
+          </a:bodyPr>
+          <a:lstStyle/>
+          <a:p>
+            <a:r>
+              <a:rPr lang="en-GB" sz="2400" dirty="0"/>
+              <a:t>Large cause-of-death datasets have become available in recent years </a:t>
+            </a:r>
+          </a:p>
+          <a:p>
+            <a:endParaRPr lang="en-GB" sz="2400" dirty="0"/>
+          </a:p>
+          <a:p>
+            <a:r>
+              <a:rPr lang="en-GB" sz="2400" dirty="0"/>
+              <a:t>Coding causes of d	</a:t>
+            </a:r>
+            <a:r>
+              <a:rPr lang="en-GB" sz="2400" dirty="0" err="1"/>
+              <a:t>eath</a:t>
+            </a:r>
+            <a:r>
+              <a:rPr lang="en-GB" sz="2400" dirty="0"/>
+              <a:t> by hand is very time-consuming and it is often impossible to hand-code a full dataset</a:t>
+            </a:r>
+          </a:p>
+          <a:p>
+            <a:endParaRPr lang="en-GB" sz="2400" dirty="0"/>
+          </a:p>
+          <a:p>
+            <a:r>
+              <a:rPr lang="en-GB" sz="2400" dirty="0"/>
+              <a:t>Machine Learning methods for automatic classification can probably help, but with what effort and precision?</a:t>
             </a:r>
           </a:p>
         </p:txBody>
@@ -7589,7 +8283,7 @@
           <a:p>
             <a:r>
               <a:rPr lang="en-GB" dirty="0"/>
-              <a:t>How?</a:t>
+              <a:t>Test case: hand-coded causes from Copenhagen</a:t>
             </a:r>
             <a:endParaRPr lang="en-DK" dirty="0"/>
           </a:p>
@@ -7611,21 +8305,1041 @@
             <p:ph idx="1"/>
           </p:nvPr>
         </p:nvSpPr>
-        <p:spPr/>
-        <p:txBody>
-          <a:bodyPr/>
-          <a:lstStyle/>
-          <a:p>
-            <a:endParaRPr lang="en-GB" dirty="0"/>
-          </a:p>
-          <a:p>
-            <a:r>
-              <a:rPr lang="en-GB" dirty="0"/>
-              <a:t>Training data: labelling data such that a model can learn from it, i.e. random selection, etc.</a:t>
-            </a:r>
-          </a:p>
-        </p:txBody>
-      </p:sp>
+        <p:spPr>
+          <a:xfrm>
+            <a:off x="838200" y="1896961"/>
+            <a:ext cx="7021749" cy="4351338"/>
+          </a:xfrm>
+        </p:spPr>
+        <p:txBody>
+          <a:bodyPr>
+            <a:normAutofit/>
+          </a:bodyPr>
+          <a:lstStyle/>
+          <a:p>
+            <a:pPr marL="0" indent="0">
+              <a:buNone/>
+            </a:pPr>
+            <a:r>
+              <a:rPr lang="en-GB" sz="2000" dirty="0"/>
+              <a:t>The data: ~ 550.000 individual-level burials from 1861 to 1940. Contains 15.776 unique causes of death. 16.3% of these have been hand-coded (top-down) to ICD10h, covering 86.6% of all deaths (in individualized dataset).</a:t>
+            </a:r>
+          </a:p>
+          <a:p>
+            <a:pPr marL="0" indent="0">
+              <a:buNone/>
+            </a:pPr>
+            <a:endParaRPr lang="en-GB" sz="2000" dirty="0"/>
+          </a:p>
+          <a:p>
+            <a:pPr marL="0" indent="0">
+              <a:buNone/>
+            </a:pPr>
+            <a:r>
+              <a:rPr lang="en-GB" sz="2000" dirty="0"/>
+              <a:t>To study </a:t>
+            </a:r>
+            <a:r>
+              <a:rPr lang="en-GB" sz="2000" b="1" dirty="0"/>
+              <a:t>the trade-off between amount of training data and prediction accuracy </a:t>
+            </a:r>
+            <a:r>
+              <a:rPr lang="en-GB" sz="2000" dirty="0"/>
+              <a:t>in automatic classification, we use only the hand-coded causes to simulate a 100% coded dataset.</a:t>
+            </a:r>
+          </a:p>
+          <a:p>
+            <a:pPr marL="0" indent="0">
+              <a:buNone/>
+            </a:pPr>
+            <a:endParaRPr lang="en-GB" sz="2000" dirty="0"/>
+          </a:p>
+          <a:p>
+            <a:pPr marL="0" indent="0">
+              <a:buNone/>
+            </a:pPr>
+            <a:r>
+              <a:rPr lang="en-GB" sz="2000" dirty="0"/>
+              <a:t>We define an accurate prediction by the model as one that hits the same ICD10h “block” as the manual coder.</a:t>
+            </a:r>
+          </a:p>
+        </p:txBody>
+      </p:sp>
+      <p:graphicFrame>
+        <p:nvGraphicFramePr>
+          <p:cNvPr id="4" name="Tabel 3">
+            <a:extLst>
+              <a:ext uri="{FF2B5EF4-FFF2-40B4-BE49-F238E27FC236}">
+                <a16:creationId xmlns:a16="http://schemas.microsoft.com/office/drawing/2014/main" id="{832BF859-BD73-2DF3-0B5C-367D29FF3BB8}"/>
+              </a:ext>
+            </a:extLst>
+          </p:cNvPr>
+          <p:cNvGraphicFramePr>
+            <a:graphicFrameLocks noGrp="1"/>
+          </p:cNvGraphicFramePr>
+          <p:nvPr>
+            <p:extLst>
+              <p:ext uri="{D42A27DB-BD31-4B8C-83A1-F6EECF244321}">
+                <p14:modId xmlns:p14="http://schemas.microsoft.com/office/powerpoint/2010/main" val="1705786855"/>
+              </p:ext>
+            </p:extLst>
+          </p:nvPr>
+        </p:nvGraphicFramePr>
+        <p:xfrm>
+          <a:off x="8151779" y="1690688"/>
+          <a:ext cx="3553837" cy="3027835"/>
+        </p:xfrm>
+        <a:graphic>
+          <a:graphicData uri="http://schemas.openxmlformats.org/drawingml/2006/table">
+            <a:tbl>
+              <a:tblPr>
+                <a:tableStyleId>{5C22544A-7EE6-4342-B048-85BDC9FD1C3A}</a:tableStyleId>
+              </a:tblPr>
+              <a:tblGrid>
+                <a:gridCol w="1089498">
+                  <a:extLst>
+                    <a:ext uri="{9D8B030D-6E8A-4147-A177-3AD203B41FA5}">
+                      <a16:colId xmlns:a16="http://schemas.microsoft.com/office/drawing/2014/main" val="1085078205"/>
+                    </a:ext>
+                  </a:extLst>
+                </a:gridCol>
+                <a:gridCol w="2464339">
+                  <a:extLst>
+                    <a:ext uri="{9D8B030D-6E8A-4147-A177-3AD203B41FA5}">
+                      <a16:colId xmlns:a16="http://schemas.microsoft.com/office/drawing/2014/main" val="739067066"/>
+                    </a:ext>
+                  </a:extLst>
+                </a:gridCol>
+              </a:tblGrid>
+              <a:tr h="161925">
+                <a:tc>
+                  <a:txBody>
+                    <a:bodyPr/>
+                    <a:lstStyle/>
+                    <a:p>
+                      <a:pPr algn="l" fontAlgn="b"/>
+                      <a:r>
+                        <a:rPr lang="da-DK" sz="1000" b="0" i="0" u="none" strike="noStrike" dirty="0">
+                          <a:effectLst/>
+                          <a:latin typeface="MS Sans Serif"/>
+                        </a:rPr>
+                        <a:t>ICD10h </a:t>
+                      </a:r>
+                      <a:r>
+                        <a:rPr lang="da-DK" sz="1000" b="0" i="0" u="none" strike="noStrike" dirty="0" err="1">
+                          <a:effectLst/>
+                          <a:latin typeface="MS Sans Serif"/>
+                        </a:rPr>
+                        <a:t>code</a:t>
+                      </a:r>
+                      <a:endParaRPr lang="da-DK" sz="1000" b="0" i="0" u="none" strike="noStrike" dirty="0">
+                        <a:effectLst/>
+                        <a:latin typeface="MS Sans Serif"/>
+                      </a:endParaRPr>
+                    </a:p>
+                  </a:txBody>
+                  <a:tcPr marL="9525" marR="9525" marT="9525" marB="0" anchor="b"/>
+                </a:tc>
+                <a:tc>
+                  <a:txBody>
+                    <a:bodyPr/>
+                    <a:lstStyle/>
+                    <a:p>
+                      <a:pPr algn="l" fontAlgn="b"/>
+                      <a:r>
+                        <a:rPr lang="en-US" sz="1000" b="0" i="0" u="none" strike="noStrike" dirty="0">
+                          <a:effectLst/>
+                          <a:latin typeface="MS Sans Serif"/>
+                        </a:rPr>
+                        <a:t>Description</a:t>
+                      </a:r>
+                    </a:p>
+                  </a:txBody>
+                  <a:tcPr marL="9525" marR="9525" marT="9525" marB="0" anchor="b"/>
+                </a:tc>
+                <a:extLst>
+                  <a:ext uri="{0D108BD9-81ED-4DB2-BD59-A6C34878D82A}">
+                    <a16:rowId xmlns:a16="http://schemas.microsoft.com/office/drawing/2014/main" val="1883423154"/>
+                  </a:ext>
+                </a:extLst>
+              </a:tr>
+              <a:tr h="161925">
+                <a:tc>
+                  <a:txBody>
+                    <a:bodyPr/>
+                    <a:lstStyle/>
+                    <a:p>
+                      <a:pPr algn="l" fontAlgn="b"/>
+                      <a:r>
+                        <a:rPr lang="da-DK" sz="1000" b="1" u="none" strike="noStrike" dirty="0">
+                          <a:effectLst/>
+                        </a:rPr>
+                        <a:t>B03</a:t>
+                      </a:r>
+                      <a:r>
+                        <a:rPr lang="da-DK" sz="1000" u="none" strike="noStrike" dirty="0">
+                          <a:effectLst/>
+                        </a:rPr>
+                        <a:t>.000</a:t>
+                      </a:r>
+                      <a:endParaRPr lang="da-DK" sz="1000" b="0" i="0" u="none" strike="noStrike" dirty="0">
+                        <a:effectLst/>
+                        <a:latin typeface="MS Sans Serif"/>
+                      </a:endParaRPr>
+                    </a:p>
+                  </a:txBody>
+                  <a:tcPr marL="9525" marR="9525" marT="9525" marB="0" anchor="b"/>
+                </a:tc>
+                <a:tc>
+                  <a:txBody>
+                    <a:bodyPr/>
+                    <a:lstStyle/>
+                    <a:p>
+                      <a:pPr algn="l" fontAlgn="b"/>
+                      <a:r>
+                        <a:rPr lang="en-US" sz="1000" u="none" strike="noStrike" dirty="0">
+                          <a:effectLst/>
+                        </a:rPr>
+                        <a:t>smallpox not known if vaccinated</a:t>
+                      </a:r>
+                      <a:endParaRPr lang="en-US" sz="1000" b="0" i="0" u="none" strike="noStrike" dirty="0">
+                        <a:effectLst/>
+                        <a:latin typeface="MS Sans Serif"/>
+                      </a:endParaRPr>
+                    </a:p>
+                  </a:txBody>
+                  <a:tcPr marL="9525" marR="9525" marT="9525" marB="0" anchor="b"/>
+                </a:tc>
+                <a:extLst>
+                  <a:ext uri="{0D108BD9-81ED-4DB2-BD59-A6C34878D82A}">
+                    <a16:rowId xmlns:a16="http://schemas.microsoft.com/office/drawing/2014/main" val="4097603760"/>
+                  </a:ext>
+                </a:extLst>
+              </a:tr>
+              <a:tr h="161925">
+                <a:tc>
+                  <a:txBody>
+                    <a:bodyPr/>
+                    <a:lstStyle/>
+                    <a:p>
+                      <a:pPr algn="l" fontAlgn="b"/>
+                      <a:r>
+                        <a:rPr lang="da-DK" sz="1000" b="1" u="none" strike="noStrike" dirty="0">
+                          <a:effectLst/>
+                        </a:rPr>
+                        <a:t>B03</a:t>
+                      </a:r>
+                      <a:r>
+                        <a:rPr lang="da-DK" sz="1000" u="none" strike="noStrike" dirty="0">
+                          <a:effectLst/>
+                        </a:rPr>
+                        <a:t>.001</a:t>
+                      </a:r>
+                      <a:endParaRPr lang="da-DK" sz="1000" b="0" i="0" u="none" strike="noStrike" dirty="0">
+                        <a:effectLst/>
+                        <a:latin typeface="MS Sans Serif"/>
+                      </a:endParaRPr>
+                    </a:p>
+                  </a:txBody>
+                  <a:tcPr marL="9525" marR="9525" marT="9525" marB="0" anchor="b"/>
+                </a:tc>
+                <a:tc>
+                  <a:txBody>
+                    <a:bodyPr/>
+                    <a:lstStyle/>
+                    <a:p>
+                      <a:pPr algn="l" fontAlgn="b"/>
+                      <a:r>
+                        <a:rPr lang="en-US" sz="1000" u="none" strike="noStrike" dirty="0">
+                          <a:effectLst/>
+                        </a:rPr>
+                        <a:t>smallpox not known if vaccinated (</a:t>
+                      </a:r>
+                      <a:r>
+                        <a:rPr lang="en-US" sz="1000" u="none" strike="noStrike" dirty="0" err="1">
+                          <a:effectLst/>
+                        </a:rPr>
+                        <a:t>blackpox</a:t>
+                      </a:r>
+                      <a:r>
+                        <a:rPr lang="en-US" sz="1000" u="none" strike="noStrike" dirty="0">
+                          <a:effectLst/>
+                        </a:rPr>
+                        <a:t>)</a:t>
+                      </a:r>
+                      <a:endParaRPr lang="en-US" sz="1000" b="0" i="0" u="none" strike="noStrike" dirty="0">
+                        <a:effectLst/>
+                        <a:latin typeface="MS Sans Serif"/>
+                      </a:endParaRPr>
+                    </a:p>
+                  </a:txBody>
+                  <a:tcPr marL="9525" marR="9525" marT="9525" marB="0" anchor="b"/>
+                </a:tc>
+                <a:extLst>
+                  <a:ext uri="{0D108BD9-81ED-4DB2-BD59-A6C34878D82A}">
+                    <a16:rowId xmlns:a16="http://schemas.microsoft.com/office/drawing/2014/main" val="661146036"/>
+                  </a:ext>
+                </a:extLst>
+              </a:tr>
+              <a:tr h="161925">
+                <a:tc>
+                  <a:txBody>
+                    <a:bodyPr/>
+                    <a:lstStyle/>
+                    <a:p>
+                      <a:pPr algn="l" fontAlgn="b"/>
+                      <a:r>
+                        <a:rPr lang="da-DK" sz="1000" b="1" u="none" strike="noStrike" dirty="0">
+                          <a:effectLst/>
+                        </a:rPr>
+                        <a:t>B03</a:t>
+                      </a:r>
+                      <a:r>
+                        <a:rPr lang="da-DK" sz="1000" u="none" strike="noStrike" dirty="0">
+                          <a:effectLst/>
+                        </a:rPr>
+                        <a:t>.002</a:t>
+                      </a:r>
+                      <a:endParaRPr lang="da-DK" sz="1000" b="0" i="0" u="none" strike="noStrike" dirty="0">
+                        <a:effectLst/>
+                        <a:latin typeface="MS Sans Serif"/>
+                      </a:endParaRPr>
+                    </a:p>
+                  </a:txBody>
+                  <a:tcPr marL="9525" marR="9525" marT="9525" marB="0" anchor="b"/>
+                </a:tc>
+                <a:tc>
+                  <a:txBody>
+                    <a:bodyPr/>
+                    <a:lstStyle/>
+                    <a:p>
+                      <a:pPr algn="l" fontAlgn="b"/>
+                      <a:r>
+                        <a:rPr lang="da-DK" sz="1000" u="none" strike="noStrike" dirty="0" err="1">
+                          <a:effectLst/>
+                        </a:rPr>
+                        <a:t>smallpox</a:t>
+                      </a:r>
+                      <a:r>
+                        <a:rPr lang="da-DK" sz="1000" u="none" strike="noStrike" dirty="0">
+                          <a:effectLst/>
+                        </a:rPr>
+                        <a:t> not </a:t>
+                      </a:r>
+                      <a:r>
+                        <a:rPr lang="da-DK" sz="1000" u="none" strike="noStrike" dirty="0" err="1">
+                          <a:effectLst/>
+                        </a:rPr>
+                        <a:t>vaccinated</a:t>
+                      </a:r>
+                      <a:endParaRPr lang="da-DK" sz="1000" b="0" i="0" u="none" strike="noStrike" dirty="0">
+                        <a:effectLst/>
+                        <a:latin typeface="MS Sans Serif"/>
+                      </a:endParaRPr>
+                    </a:p>
+                  </a:txBody>
+                  <a:tcPr marL="9525" marR="9525" marT="9525" marB="0" anchor="b"/>
+                </a:tc>
+                <a:extLst>
+                  <a:ext uri="{0D108BD9-81ED-4DB2-BD59-A6C34878D82A}">
+                    <a16:rowId xmlns:a16="http://schemas.microsoft.com/office/drawing/2014/main" val="3371697693"/>
+                  </a:ext>
+                </a:extLst>
+              </a:tr>
+              <a:tr h="294160">
+                <a:tc>
+                  <a:txBody>
+                    <a:bodyPr/>
+                    <a:lstStyle/>
+                    <a:p>
+                      <a:pPr algn="l" fontAlgn="b"/>
+                      <a:r>
+                        <a:rPr lang="da-DK" sz="1000" b="1" u="none" strike="noStrike" dirty="0">
+                          <a:effectLst/>
+                        </a:rPr>
+                        <a:t>B05</a:t>
+                      </a:r>
+                      <a:r>
+                        <a:rPr lang="da-DK" sz="1000" u="none" strike="noStrike" dirty="0">
+                          <a:effectLst/>
+                        </a:rPr>
+                        <a:t>.000</a:t>
+                      </a:r>
+                      <a:endParaRPr lang="da-DK" sz="1000" b="0" i="0" u="none" strike="noStrike" dirty="0">
+                        <a:effectLst/>
+                        <a:latin typeface="MS Sans Serif"/>
+                      </a:endParaRPr>
+                    </a:p>
+                  </a:txBody>
+                  <a:tcPr marL="9525" marR="9525" marT="9525" marB="0" anchor="b"/>
+                </a:tc>
+                <a:tc>
+                  <a:txBody>
+                    <a:bodyPr/>
+                    <a:lstStyle/>
+                    <a:p>
+                      <a:pPr algn="l" fontAlgn="b"/>
+                      <a:r>
+                        <a:rPr lang="da-DK" sz="1000" u="none" strike="noStrike" dirty="0" err="1">
+                          <a:effectLst/>
+                        </a:rPr>
+                        <a:t>Measles</a:t>
+                      </a:r>
+                      <a:r>
+                        <a:rPr lang="da-DK" sz="1000" u="none" strike="noStrike" dirty="0">
+                          <a:effectLst/>
+                        </a:rPr>
+                        <a:t> </a:t>
+                      </a:r>
+                      <a:r>
+                        <a:rPr lang="da-DK" sz="1000" u="none" strike="noStrike" dirty="0" err="1">
+                          <a:effectLst/>
+                        </a:rPr>
+                        <a:t>complicated</a:t>
+                      </a:r>
+                      <a:r>
+                        <a:rPr lang="da-DK" sz="1000" u="none" strike="noStrike" dirty="0">
+                          <a:effectLst/>
+                        </a:rPr>
+                        <a:t> by </a:t>
+                      </a:r>
+                      <a:r>
+                        <a:rPr lang="da-DK" sz="1000" u="none" strike="noStrike" dirty="0" err="1">
+                          <a:effectLst/>
+                        </a:rPr>
+                        <a:t>encephalitis</a:t>
+                      </a:r>
+                      <a:endParaRPr lang="da-DK" sz="1000" b="0" i="0" u="none" strike="noStrike" dirty="0">
+                        <a:effectLst/>
+                        <a:latin typeface="MS Sans Serif"/>
+                      </a:endParaRPr>
+                    </a:p>
+                  </a:txBody>
+                  <a:tcPr marL="9525" marR="9525" marT="9525" marB="0" anchor="b"/>
+                </a:tc>
+                <a:extLst>
+                  <a:ext uri="{0D108BD9-81ED-4DB2-BD59-A6C34878D82A}">
+                    <a16:rowId xmlns:a16="http://schemas.microsoft.com/office/drawing/2014/main" val="4144085792"/>
+                  </a:ext>
+                </a:extLst>
+              </a:tr>
+              <a:tr h="161925">
+                <a:tc>
+                  <a:txBody>
+                    <a:bodyPr/>
+                    <a:lstStyle/>
+                    <a:p>
+                      <a:pPr algn="l" fontAlgn="b"/>
+                      <a:r>
+                        <a:rPr lang="da-DK" sz="1000" b="1" u="none" strike="noStrike" dirty="0">
+                          <a:effectLst/>
+                        </a:rPr>
+                        <a:t>B05</a:t>
+                      </a:r>
+                      <a:r>
+                        <a:rPr lang="da-DK" sz="1000" u="none" strike="noStrike" dirty="0">
+                          <a:effectLst/>
+                        </a:rPr>
+                        <a:t>.100</a:t>
+                      </a:r>
+                      <a:endParaRPr lang="da-DK" sz="1000" b="0" i="0" u="none" strike="noStrike" dirty="0">
+                        <a:effectLst/>
+                        <a:latin typeface="MS Sans Serif"/>
+                      </a:endParaRPr>
+                    </a:p>
+                  </a:txBody>
+                  <a:tcPr marL="9525" marR="9525" marT="9525" marB="0" anchor="b"/>
+                </a:tc>
+                <a:tc>
+                  <a:txBody>
+                    <a:bodyPr/>
+                    <a:lstStyle/>
+                    <a:p>
+                      <a:pPr algn="l" fontAlgn="b"/>
+                      <a:r>
+                        <a:rPr lang="da-DK" sz="1000" u="none" strike="noStrike">
+                          <a:effectLst/>
+                        </a:rPr>
+                        <a:t>Measles complicated by meningitis</a:t>
+                      </a:r>
+                      <a:endParaRPr lang="da-DK" sz="1000" b="0" i="0" u="none" strike="noStrike">
+                        <a:effectLst/>
+                        <a:latin typeface="MS Sans Serif"/>
+                      </a:endParaRPr>
+                    </a:p>
+                  </a:txBody>
+                  <a:tcPr marL="9525" marR="9525" marT="9525" marB="0" anchor="b"/>
+                </a:tc>
+                <a:extLst>
+                  <a:ext uri="{0D108BD9-81ED-4DB2-BD59-A6C34878D82A}">
+                    <a16:rowId xmlns:a16="http://schemas.microsoft.com/office/drawing/2014/main" val="2036400861"/>
+                  </a:ext>
+                </a:extLst>
+              </a:tr>
+              <a:tr h="161925">
+                <a:tc>
+                  <a:txBody>
+                    <a:bodyPr/>
+                    <a:lstStyle/>
+                    <a:p>
+                      <a:pPr algn="l" fontAlgn="b"/>
+                      <a:r>
+                        <a:rPr lang="da-DK" sz="1000" b="1" u="none" strike="noStrike" dirty="0">
+                          <a:effectLst/>
+                        </a:rPr>
+                        <a:t>B05</a:t>
+                      </a:r>
+                      <a:r>
+                        <a:rPr lang="da-DK" sz="1000" u="none" strike="noStrike" dirty="0">
+                          <a:effectLst/>
+                        </a:rPr>
+                        <a:t>.200</a:t>
+                      </a:r>
+                      <a:endParaRPr lang="da-DK" sz="1000" b="0" i="0" u="none" strike="noStrike" dirty="0">
+                        <a:effectLst/>
+                        <a:latin typeface="MS Sans Serif"/>
+                      </a:endParaRPr>
+                    </a:p>
+                  </a:txBody>
+                  <a:tcPr marL="9525" marR="9525" marT="9525" marB="0" anchor="b"/>
+                </a:tc>
+                <a:tc>
+                  <a:txBody>
+                    <a:bodyPr/>
+                    <a:lstStyle/>
+                    <a:p>
+                      <a:pPr algn="l" fontAlgn="b"/>
+                      <a:r>
+                        <a:rPr lang="da-DK" sz="1000" u="none" strike="noStrike">
+                          <a:effectLst/>
+                        </a:rPr>
+                        <a:t>Measles complicated by pneumonia</a:t>
+                      </a:r>
+                      <a:endParaRPr lang="da-DK" sz="1000" b="0" i="0" u="none" strike="noStrike">
+                        <a:effectLst/>
+                        <a:latin typeface="MS Sans Serif"/>
+                      </a:endParaRPr>
+                    </a:p>
+                  </a:txBody>
+                  <a:tcPr marL="9525" marR="9525" marT="9525" marB="0" anchor="b"/>
+                </a:tc>
+                <a:extLst>
+                  <a:ext uri="{0D108BD9-81ED-4DB2-BD59-A6C34878D82A}">
+                    <a16:rowId xmlns:a16="http://schemas.microsoft.com/office/drawing/2014/main" val="2873881674"/>
+                  </a:ext>
+                </a:extLst>
+              </a:tr>
+              <a:tr h="161925">
+                <a:tc>
+                  <a:txBody>
+                    <a:bodyPr/>
+                    <a:lstStyle/>
+                    <a:p>
+                      <a:pPr algn="l" fontAlgn="b"/>
+                      <a:r>
+                        <a:rPr lang="da-DK" sz="1000" b="1" u="none" strike="noStrike" dirty="0">
+                          <a:effectLst/>
+                        </a:rPr>
+                        <a:t>B05</a:t>
+                      </a:r>
+                      <a:r>
+                        <a:rPr lang="da-DK" sz="1000" u="none" strike="noStrike" dirty="0">
+                          <a:effectLst/>
+                        </a:rPr>
+                        <a:t>.201</a:t>
+                      </a:r>
+                      <a:endParaRPr lang="da-DK" sz="1000" b="0" i="0" u="none" strike="noStrike" dirty="0">
+                        <a:effectLst/>
+                        <a:latin typeface="MS Sans Serif"/>
+                      </a:endParaRPr>
+                    </a:p>
+                  </a:txBody>
+                  <a:tcPr marL="9525" marR="9525" marT="9525" marB="0" anchor="b"/>
+                </a:tc>
+                <a:tc>
+                  <a:txBody>
+                    <a:bodyPr/>
+                    <a:lstStyle/>
+                    <a:p>
+                      <a:pPr algn="l" fontAlgn="b"/>
+                      <a:r>
+                        <a:rPr lang="en-US" sz="1000" u="none" strike="noStrike">
+                          <a:effectLst/>
+                        </a:rPr>
+                        <a:t>Measles complicated by bronchitis or laryngitis</a:t>
+                      </a:r>
+                      <a:endParaRPr lang="en-US" sz="1000" b="0" i="0" u="none" strike="noStrike">
+                        <a:effectLst/>
+                        <a:latin typeface="MS Sans Serif"/>
+                      </a:endParaRPr>
+                    </a:p>
+                  </a:txBody>
+                  <a:tcPr marL="9525" marR="9525" marT="9525" marB="0" anchor="b"/>
+                </a:tc>
+                <a:extLst>
+                  <a:ext uri="{0D108BD9-81ED-4DB2-BD59-A6C34878D82A}">
+                    <a16:rowId xmlns:a16="http://schemas.microsoft.com/office/drawing/2014/main" val="622304580"/>
+                  </a:ext>
+                </a:extLst>
+              </a:tr>
+              <a:tr h="161925">
+                <a:tc>
+                  <a:txBody>
+                    <a:bodyPr/>
+                    <a:lstStyle/>
+                    <a:p>
+                      <a:pPr algn="l" fontAlgn="b"/>
+                      <a:r>
+                        <a:rPr lang="da-DK" sz="1000" b="1" u="none" strike="noStrike" dirty="0">
+                          <a:effectLst/>
+                        </a:rPr>
+                        <a:t>B05</a:t>
+                      </a:r>
+                      <a:r>
+                        <a:rPr lang="da-DK" sz="1000" u="none" strike="noStrike" dirty="0">
+                          <a:effectLst/>
+                        </a:rPr>
+                        <a:t>.202</a:t>
+                      </a:r>
+                      <a:endParaRPr lang="da-DK" sz="1000" b="0" i="0" u="none" strike="noStrike" dirty="0">
+                        <a:effectLst/>
+                        <a:latin typeface="MS Sans Serif"/>
+                      </a:endParaRPr>
+                    </a:p>
+                  </a:txBody>
+                  <a:tcPr marL="9525" marR="9525" marT="9525" marB="0" anchor="b"/>
+                </a:tc>
+                <a:tc>
+                  <a:txBody>
+                    <a:bodyPr/>
+                    <a:lstStyle/>
+                    <a:p>
+                      <a:pPr algn="l" fontAlgn="b"/>
+                      <a:r>
+                        <a:rPr lang="en-US" sz="1000" u="none" strike="noStrike">
+                          <a:effectLst/>
+                        </a:rPr>
+                        <a:t>Measles with other pulmonary complications</a:t>
+                      </a:r>
+                      <a:endParaRPr lang="en-US" sz="1000" b="0" i="0" u="none" strike="noStrike">
+                        <a:effectLst/>
+                        <a:latin typeface="MS Sans Serif"/>
+                      </a:endParaRPr>
+                    </a:p>
+                  </a:txBody>
+                  <a:tcPr marL="9525" marR="9525" marT="9525" marB="0" anchor="b"/>
+                </a:tc>
+                <a:extLst>
+                  <a:ext uri="{0D108BD9-81ED-4DB2-BD59-A6C34878D82A}">
+                    <a16:rowId xmlns:a16="http://schemas.microsoft.com/office/drawing/2014/main" val="2367924944"/>
+                  </a:ext>
+                </a:extLst>
+              </a:tr>
+              <a:tr h="161925">
+                <a:tc>
+                  <a:txBody>
+                    <a:bodyPr/>
+                    <a:lstStyle/>
+                    <a:p>
+                      <a:pPr algn="l" fontAlgn="b"/>
+                      <a:r>
+                        <a:rPr lang="da-DK" sz="1000" b="1" u="none" strike="noStrike" dirty="0">
+                          <a:effectLst/>
+                        </a:rPr>
+                        <a:t>B05</a:t>
+                      </a:r>
+                      <a:r>
+                        <a:rPr lang="da-DK" sz="1000" u="none" strike="noStrike" dirty="0">
+                          <a:effectLst/>
+                        </a:rPr>
+                        <a:t>.203</a:t>
+                      </a:r>
+                      <a:endParaRPr lang="da-DK" sz="1000" b="0" i="0" u="none" strike="noStrike" dirty="0">
+                        <a:effectLst/>
+                        <a:latin typeface="MS Sans Serif"/>
+                      </a:endParaRPr>
+                    </a:p>
+                  </a:txBody>
+                  <a:tcPr marL="9525" marR="9525" marT="9525" marB="0" anchor="b"/>
+                </a:tc>
+                <a:tc>
+                  <a:txBody>
+                    <a:bodyPr/>
+                    <a:lstStyle/>
+                    <a:p>
+                      <a:pPr algn="l" fontAlgn="b"/>
+                      <a:r>
+                        <a:rPr lang="da-DK" sz="1000" u="none" strike="noStrike">
+                          <a:effectLst/>
+                        </a:rPr>
+                        <a:t>measles complicated by phthisis</a:t>
+                      </a:r>
+                      <a:endParaRPr lang="da-DK" sz="1000" b="0" i="0" u="none" strike="noStrike">
+                        <a:effectLst/>
+                        <a:latin typeface="MS Sans Serif"/>
+                      </a:endParaRPr>
+                    </a:p>
+                  </a:txBody>
+                  <a:tcPr marL="9525" marR="9525" marT="9525" marB="0" anchor="b"/>
+                </a:tc>
+                <a:extLst>
+                  <a:ext uri="{0D108BD9-81ED-4DB2-BD59-A6C34878D82A}">
+                    <a16:rowId xmlns:a16="http://schemas.microsoft.com/office/drawing/2014/main" val="4100673936"/>
+                  </a:ext>
+                </a:extLst>
+              </a:tr>
+              <a:tr h="161925">
+                <a:tc>
+                  <a:txBody>
+                    <a:bodyPr/>
+                    <a:lstStyle/>
+                    <a:p>
+                      <a:pPr algn="l" fontAlgn="b"/>
+                      <a:r>
+                        <a:rPr lang="da-DK" sz="1000" b="1" u="none" strike="noStrike" dirty="0">
+                          <a:effectLst/>
+                        </a:rPr>
+                        <a:t>B05</a:t>
+                      </a:r>
+                      <a:r>
+                        <a:rPr lang="da-DK" sz="1000" u="none" strike="noStrike" dirty="0">
+                          <a:effectLst/>
+                        </a:rPr>
+                        <a:t>.300</a:t>
+                      </a:r>
+                      <a:endParaRPr lang="da-DK" sz="1000" b="0" i="0" u="none" strike="noStrike" dirty="0">
+                        <a:effectLst/>
+                        <a:latin typeface="MS Sans Serif"/>
+                      </a:endParaRPr>
+                    </a:p>
+                  </a:txBody>
+                  <a:tcPr marL="9525" marR="9525" marT="9525" marB="0" anchor="b"/>
+                </a:tc>
+                <a:tc>
+                  <a:txBody>
+                    <a:bodyPr/>
+                    <a:lstStyle/>
+                    <a:p>
+                      <a:pPr algn="l" fontAlgn="b"/>
+                      <a:r>
+                        <a:rPr lang="en-US" sz="1000" u="none" strike="noStrike">
+                          <a:effectLst/>
+                        </a:rPr>
+                        <a:t>measles complicated by otitis media</a:t>
+                      </a:r>
+                      <a:endParaRPr lang="en-US" sz="1000" b="0" i="0" u="none" strike="noStrike">
+                        <a:effectLst/>
+                        <a:latin typeface="MS Sans Serif"/>
+                      </a:endParaRPr>
+                    </a:p>
+                  </a:txBody>
+                  <a:tcPr marL="9525" marR="9525" marT="9525" marB="0" anchor="b"/>
+                </a:tc>
+                <a:extLst>
+                  <a:ext uri="{0D108BD9-81ED-4DB2-BD59-A6C34878D82A}">
+                    <a16:rowId xmlns:a16="http://schemas.microsoft.com/office/drawing/2014/main" val="1495637124"/>
+                  </a:ext>
+                </a:extLst>
+              </a:tr>
+              <a:tr h="161925">
+                <a:tc>
+                  <a:txBody>
+                    <a:bodyPr/>
+                    <a:lstStyle/>
+                    <a:p>
+                      <a:pPr algn="l" fontAlgn="b"/>
+                      <a:r>
+                        <a:rPr lang="da-DK" sz="1000" b="1" u="none" strike="noStrike" dirty="0">
+                          <a:effectLst/>
+                        </a:rPr>
+                        <a:t>B05</a:t>
+                      </a:r>
+                      <a:r>
+                        <a:rPr lang="da-DK" sz="1000" u="none" strike="noStrike" dirty="0">
+                          <a:effectLst/>
+                        </a:rPr>
+                        <a:t>.400</a:t>
+                      </a:r>
+                      <a:endParaRPr lang="da-DK" sz="1000" b="0" i="0" u="none" strike="noStrike" dirty="0">
+                        <a:effectLst/>
+                        <a:latin typeface="MS Sans Serif"/>
+                      </a:endParaRPr>
+                    </a:p>
+                  </a:txBody>
+                  <a:tcPr marL="9525" marR="9525" marT="9525" marB="0" anchor="b"/>
+                </a:tc>
+                <a:tc>
+                  <a:txBody>
+                    <a:bodyPr/>
+                    <a:lstStyle/>
+                    <a:p>
+                      <a:pPr algn="l" fontAlgn="b"/>
+                      <a:r>
+                        <a:rPr lang="da-DK" sz="1000" u="none" strike="noStrike">
+                          <a:effectLst/>
+                        </a:rPr>
+                        <a:t>Measles with intestinal complications</a:t>
+                      </a:r>
+                      <a:endParaRPr lang="da-DK" sz="1000" b="0" i="0" u="none" strike="noStrike">
+                        <a:effectLst/>
+                        <a:latin typeface="MS Sans Serif"/>
+                      </a:endParaRPr>
+                    </a:p>
+                  </a:txBody>
+                  <a:tcPr marL="9525" marR="9525" marT="9525" marB="0" anchor="b"/>
+                </a:tc>
+                <a:extLst>
+                  <a:ext uri="{0D108BD9-81ED-4DB2-BD59-A6C34878D82A}">
+                    <a16:rowId xmlns:a16="http://schemas.microsoft.com/office/drawing/2014/main" val="1876626037"/>
+                  </a:ext>
+                </a:extLst>
+              </a:tr>
+              <a:tr h="161925">
+                <a:tc>
+                  <a:txBody>
+                    <a:bodyPr/>
+                    <a:lstStyle/>
+                    <a:p>
+                      <a:pPr algn="l" fontAlgn="b"/>
+                      <a:r>
+                        <a:rPr lang="da-DK" sz="1000" b="1" u="none" strike="noStrike" dirty="0">
+                          <a:effectLst/>
+                        </a:rPr>
+                        <a:t>B05</a:t>
+                      </a:r>
+                      <a:r>
+                        <a:rPr lang="da-DK" sz="1000" u="none" strike="noStrike" dirty="0">
+                          <a:effectLst/>
+                        </a:rPr>
+                        <a:t>.800</a:t>
+                      </a:r>
+                      <a:endParaRPr lang="da-DK" sz="1000" b="0" i="0" u="none" strike="noStrike" dirty="0">
+                        <a:effectLst/>
+                        <a:latin typeface="MS Sans Serif"/>
+                      </a:endParaRPr>
+                    </a:p>
+                  </a:txBody>
+                  <a:tcPr marL="9525" marR="9525" marT="9525" marB="0" anchor="b"/>
+                </a:tc>
+                <a:tc>
+                  <a:txBody>
+                    <a:bodyPr/>
+                    <a:lstStyle/>
+                    <a:p>
+                      <a:pPr algn="l" fontAlgn="b"/>
+                      <a:r>
+                        <a:rPr lang="da-DK" sz="1000" u="none" strike="noStrike">
+                          <a:effectLst/>
+                        </a:rPr>
+                        <a:t>measles with other complications</a:t>
+                      </a:r>
+                      <a:endParaRPr lang="da-DK" sz="1000" b="0" i="0" u="none" strike="noStrike">
+                        <a:effectLst/>
+                        <a:latin typeface="MS Sans Serif"/>
+                      </a:endParaRPr>
+                    </a:p>
+                  </a:txBody>
+                  <a:tcPr marL="9525" marR="9525" marT="9525" marB="0" anchor="b"/>
+                </a:tc>
+                <a:extLst>
+                  <a:ext uri="{0D108BD9-81ED-4DB2-BD59-A6C34878D82A}">
+                    <a16:rowId xmlns:a16="http://schemas.microsoft.com/office/drawing/2014/main" val="611024123"/>
+                  </a:ext>
+                </a:extLst>
+              </a:tr>
+              <a:tr h="161925">
+                <a:tc>
+                  <a:txBody>
+                    <a:bodyPr/>
+                    <a:lstStyle/>
+                    <a:p>
+                      <a:pPr algn="l" fontAlgn="b"/>
+                      <a:r>
+                        <a:rPr lang="da-DK" sz="1000" b="1" u="none" strike="noStrike" dirty="0">
+                          <a:effectLst/>
+                        </a:rPr>
+                        <a:t>B05</a:t>
+                      </a:r>
+                      <a:r>
+                        <a:rPr lang="da-DK" sz="1000" u="none" strike="noStrike" dirty="0">
+                          <a:effectLst/>
+                        </a:rPr>
+                        <a:t>.801</a:t>
+                      </a:r>
+                      <a:endParaRPr lang="da-DK" sz="1000" b="0" i="0" u="none" strike="noStrike" dirty="0">
+                        <a:effectLst/>
+                        <a:latin typeface="MS Sans Serif"/>
+                      </a:endParaRPr>
+                    </a:p>
+                  </a:txBody>
+                  <a:tcPr marL="9525" marR="9525" marT="9525" marB="0" anchor="b"/>
+                </a:tc>
+                <a:tc>
+                  <a:txBody>
+                    <a:bodyPr/>
+                    <a:lstStyle/>
+                    <a:p>
+                      <a:pPr algn="l" fontAlgn="b"/>
+                      <a:r>
+                        <a:rPr lang="da-DK" sz="1000" u="none" strike="noStrike">
+                          <a:effectLst/>
+                        </a:rPr>
+                        <a:t>Measles with diphtheria</a:t>
+                      </a:r>
+                      <a:endParaRPr lang="da-DK" sz="1000" b="0" i="0" u="none" strike="noStrike">
+                        <a:effectLst/>
+                        <a:latin typeface="MS Sans Serif"/>
+                      </a:endParaRPr>
+                    </a:p>
+                  </a:txBody>
+                  <a:tcPr marL="9525" marR="9525" marT="9525" marB="0" anchor="b"/>
+                </a:tc>
+                <a:extLst>
+                  <a:ext uri="{0D108BD9-81ED-4DB2-BD59-A6C34878D82A}">
+                    <a16:rowId xmlns:a16="http://schemas.microsoft.com/office/drawing/2014/main" val="1001340235"/>
+                  </a:ext>
+                </a:extLst>
+              </a:tr>
+              <a:tr h="161925">
+                <a:tc>
+                  <a:txBody>
+                    <a:bodyPr/>
+                    <a:lstStyle/>
+                    <a:p>
+                      <a:pPr algn="l" fontAlgn="b"/>
+                      <a:r>
+                        <a:rPr lang="da-DK" sz="1000" b="1" u="none" strike="noStrike" dirty="0">
+                          <a:effectLst/>
+                        </a:rPr>
+                        <a:t>B05</a:t>
+                      </a:r>
+                      <a:r>
+                        <a:rPr lang="da-DK" sz="1000" u="none" strike="noStrike" dirty="0">
+                          <a:effectLst/>
+                        </a:rPr>
+                        <a:t>.802</a:t>
+                      </a:r>
+                      <a:endParaRPr lang="da-DK" sz="1000" b="0" i="0" u="none" strike="noStrike" dirty="0">
+                        <a:effectLst/>
+                        <a:latin typeface="MS Sans Serif"/>
+                      </a:endParaRPr>
+                    </a:p>
+                  </a:txBody>
+                  <a:tcPr marL="9525" marR="9525" marT="9525" marB="0" anchor="b"/>
+                </a:tc>
+                <a:tc>
+                  <a:txBody>
+                    <a:bodyPr/>
+                    <a:lstStyle/>
+                    <a:p>
+                      <a:pPr algn="l" fontAlgn="b"/>
+                      <a:r>
+                        <a:rPr lang="da-DK" sz="1000" u="none" strike="noStrike">
+                          <a:effectLst/>
+                        </a:rPr>
+                        <a:t>Measles with whooping cough</a:t>
+                      </a:r>
+                      <a:endParaRPr lang="da-DK" sz="1000" b="0" i="0" u="none" strike="noStrike">
+                        <a:effectLst/>
+                        <a:latin typeface="MS Sans Serif"/>
+                      </a:endParaRPr>
+                    </a:p>
+                  </a:txBody>
+                  <a:tcPr marL="9525" marR="9525" marT="9525" marB="0" anchor="b"/>
+                </a:tc>
+                <a:extLst>
+                  <a:ext uri="{0D108BD9-81ED-4DB2-BD59-A6C34878D82A}">
+                    <a16:rowId xmlns:a16="http://schemas.microsoft.com/office/drawing/2014/main" val="1095967109"/>
+                  </a:ext>
+                </a:extLst>
+              </a:tr>
+              <a:tr h="161925">
+                <a:tc>
+                  <a:txBody>
+                    <a:bodyPr/>
+                    <a:lstStyle/>
+                    <a:p>
+                      <a:pPr algn="l" fontAlgn="b"/>
+                      <a:r>
+                        <a:rPr lang="da-DK" sz="1000" b="1" u="none" strike="noStrike" dirty="0">
+                          <a:effectLst/>
+                        </a:rPr>
+                        <a:t>B05</a:t>
+                      </a:r>
+                      <a:r>
+                        <a:rPr lang="da-DK" sz="1000" u="none" strike="noStrike" dirty="0">
+                          <a:effectLst/>
+                        </a:rPr>
+                        <a:t>.900</a:t>
+                      </a:r>
+                      <a:endParaRPr lang="da-DK" sz="1000" b="0" i="0" u="none" strike="noStrike" dirty="0">
+                        <a:effectLst/>
+                        <a:latin typeface="MS Sans Serif"/>
+                      </a:endParaRPr>
+                    </a:p>
+                  </a:txBody>
+                  <a:tcPr marL="9525" marR="9525" marT="9525" marB="0" anchor="b"/>
+                </a:tc>
+                <a:tc>
+                  <a:txBody>
+                    <a:bodyPr/>
+                    <a:lstStyle/>
+                    <a:p>
+                      <a:pPr algn="l" fontAlgn="b"/>
+                      <a:r>
+                        <a:rPr lang="en-US" sz="1000" u="none" strike="noStrike" dirty="0">
+                          <a:effectLst/>
+                        </a:rPr>
+                        <a:t>measles, no mention of complication</a:t>
+                      </a:r>
+                      <a:endParaRPr lang="en-US" sz="1000" b="0" i="0" u="none" strike="noStrike" dirty="0">
+                        <a:effectLst/>
+                        <a:latin typeface="MS Sans Serif"/>
+                      </a:endParaRPr>
+                    </a:p>
+                  </a:txBody>
+                  <a:tcPr marL="9525" marR="9525" marT="9525" marB="0" anchor="b"/>
+                </a:tc>
+                <a:extLst>
+                  <a:ext uri="{0D108BD9-81ED-4DB2-BD59-A6C34878D82A}">
+                    <a16:rowId xmlns:a16="http://schemas.microsoft.com/office/drawing/2014/main" val="2248522565"/>
+                  </a:ext>
+                </a:extLst>
+              </a:tr>
+            </a:tbl>
+          </a:graphicData>
+        </a:graphic>
+      </p:graphicFrame>
+      <p:pic>
+        <p:nvPicPr>
+          <p:cNvPr id="10" name="Picture 9">
+            <a:extLst>
+              <a:ext uri="{FF2B5EF4-FFF2-40B4-BE49-F238E27FC236}">
+                <a16:creationId xmlns:a16="http://schemas.microsoft.com/office/drawing/2014/main" id="{FA9B0534-7440-4484-4661-EF2D0F4E72B4}"/>
+              </a:ext>
+            </a:extLst>
+          </p:cNvPr>
+          <p:cNvPicPr>
+            <a:picLocks noChangeAspect="1"/>
+          </p:cNvPicPr>
+          <p:nvPr/>
+        </p:nvPicPr>
+        <p:blipFill>
+          <a:blip r:embed="rId3"/>
+          <a:stretch>
+            <a:fillRect/>
+          </a:stretch>
+        </p:blipFill>
+        <p:spPr>
+          <a:xfrm>
+            <a:off x="7844853" y="5167312"/>
+            <a:ext cx="4167687" cy="1422082"/>
+          </a:xfrm>
+          <a:prstGeom prst="rect">
+            <a:avLst/>
+          </a:prstGeom>
+        </p:spPr>
+      </p:pic>
     </p:spTree>
     <p:extLst>
       <p:ext uri="{BB962C8B-B14F-4D97-AF65-F5344CB8AC3E}">
@@ -7679,9 +9393,13 @@
           <a:p>
             <a:r>
               <a:rPr lang="en-GB" dirty="0"/>
-              <a:t>Active Learning: a Historian’s dream</a:t>
-            </a:r>
-            <a:endParaRPr lang="en-DK" dirty="0"/>
+              <a:t>Selecting what to code </a:t>
+            </a:r>
+            <a:r>
+              <a:rPr lang="en-GB" i="1" dirty="0"/>
+              <a:t>matters</a:t>
+            </a:r>
+            <a:endParaRPr lang="en-DK" i="1" dirty="0"/>
           </a:p>
         </p:txBody>
       </p:sp>
@@ -7701,39 +9419,180 @@
             <p:ph idx="1"/>
           </p:nvPr>
         </p:nvSpPr>
-        <p:spPr/>
-        <p:txBody>
-          <a:bodyPr/>
-          <a:lstStyle/>
-          <a:p>
-            <a:r>
-              <a:rPr lang="en-GB" dirty="0"/>
-              <a:t>A method developed for creating training data when each classification is </a:t>
-            </a:r>
-            <a:r>
-              <a:rPr lang="en-GB" i="1" dirty="0"/>
-              <a:t>time-consuming</a:t>
-            </a:r>
-            <a:r>
-              <a:rPr lang="en-GB" dirty="0"/>
-              <a:t> or </a:t>
-            </a:r>
-            <a:r>
-              <a:rPr lang="en-GB" i="1" dirty="0"/>
-              <a:t>expensive</a:t>
-            </a:r>
-          </a:p>
-          <a:p>
-            <a:endParaRPr lang="en-DK" dirty="0"/>
+        <p:spPr>
+          <a:xfrm>
+            <a:off x="838200" y="1611617"/>
+            <a:ext cx="10515600" cy="4351338"/>
+          </a:xfrm>
+        </p:spPr>
+        <p:txBody>
+          <a:bodyPr>
+            <a:normAutofit/>
+          </a:bodyPr>
+          <a:lstStyle/>
+          <a:p>
+            <a:pPr marL="0" indent="0">
+              <a:buNone/>
+            </a:pPr>
+            <a:r>
+              <a:rPr lang="en-GB" sz="2000" dirty="0"/>
+              <a:t>The accuracy of the classification model is higher if the training data is randomly selected rather than selected from the top-down.</a:t>
+            </a:r>
+            <a:endParaRPr lang="en-DK" sz="2400" dirty="0"/>
           </a:p>
         </p:txBody>
       </p:sp>
       <p:pic>
         <p:nvPicPr>
-          <p:cNvPr id="1028" name="Picture 4" descr="Active Learning - The Decision Lab">
-            <a:extLst>
-              <a:ext uri="{FF2B5EF4-FFF2-40B4-BE49-F238E27FC236}">
-                <a16:creationId xmlns:a16="http://schemas.microsoft.com/office/drawing/2014/main" id="{72B6F878-C23B-07CC-52E3-52FCD1470E74}"/>
+          <p:cNvPr id="9" name="Picture 8">
+            <a:extLst>
+              <a:ext uri="{FF2B5EF4-FFF2-40B4-BE49-F238E27FC236}">
+                <a16:creationId xmlns:a16="http://schemas.microsoft.com/office/drawing/2014/main" id="{30CF7E7E-30E3-C79C-DBEC-E600B970535A}"/>
+              </a:ext>
+            </a:extLst>
+          </p:cNvPr>
+          <p:cNvPicPr>
+            <a:picLocks noChangeAspect="1"/>
+          </p:cNvPicPr>
+          <p:nvPr/>
+        </p:nvPicPr>
+        <p:blipFill>
+          <a:blip r:embed="rId3"/>
+          <a:stretch>
+            <a:fillRect/>
+          </a:stretch>
+        </p:blipFill>
+        <p:spPr>
+          <a:xfrm>
+            <a:off x="3206655" y="2250271"/>
+            <a:ext cx="5778690" cy="4607729"/>
+          </a:xfrm>
+          <a:prstGeom prst="rect">
+            <a:avLst/>
+          </a:prstGeom>
+        </p:spPr>
+      </p:pic>
+    </p:spTree>
+    <p:extLst>
+      <p:ext uri="{BB962C8B-B14F-4D97-AF65-F5344CB8AC3E}">
+        <p14:creationId xmlns:p14="http://schemas.microsoft.com/office/powerpoint/2010/main" val="418290538"/>
+      </p:ext>
+    </p:extLst>
+  </p:cSld>
+  <p:clrMapOvr>
+    <a:masterClrMapping/>
+  </p:clrMapOvr>
+</p:sld>
+</file>
+
+<file path=ppt/slides/slide5.xml><?xml version="1.0" encoding="utf-8"?>
+<p:sld xmlns:a="http://schemas.openxmlformats.org/drawingml/2006/main" xmlns:r="http://schemas.openxmlformats.org/officeDocument/2006/relationships" xmlns:p="http://schemas.openxmlformats.org/presentationml/2006/main">
+  <p:cSld>
+    <p:spTree>
+      <p:nvGrpSpPr>
+        <p:cNvPr id="1" name="">
+          <a:extLst>
+            <a:ext uri="{FF2B5EF4-FFF2-40B4-BE49-F238E27FC236}">
+              <a16:creationId xmlns:a16="http://schemas.microsoft.com/office/drawing/2014/main" id="{81EAD0B7-8E31-76E1-8B11-9124544FEDCD}"/>
+            </a:ext>
+          </a:extLst>
+        </p:cNvPr>
+        <p:cNvGrpSpPr/>
+        <p:nvPr/>
+      </p:nvGrpSpPr>
+      <p:grpSpPr>
+        <a:xfrm>
+          <a:off x="0" y="0"/>
+          <a:ext cx="0" cy="0"/>
+          <a:chOff x="0" y="0"/>
+          <a:chExt cx="0" cy="0"/>
+        </a:xfrm>
+      </p:grpSpPr>
+      <p:sp>
+        <p:nvSpPr>
+          <p:cNvPr id="2" name="Title 1">
+            <a:extLst>
+              <a:ext uri="{FF2B5EF4-FFF2-40B4-BE49-F238E27FC236}">
+                <a16:creationId xmlns:a16="http://schemas.microsoft.com/office/drawing/2014/main" id="{5FFE6F66-B19E-DE66-B6E7-DA22EF6EFDB8}"/>
+              </a:ext>
+            </a:extLst>
+          </p:cNvPr>
+          <p:cNvSpPr>
+            <a:spLocks noGrp="1"/>
+          </p:cNvSpPr>
+          <p:nvPr>
+            <p:ph type="title"/>
+          </p:nvPr>
+        </p:nvSpPr>
+        <p:spPr/>
+        <p:txBody>
+          <a:bodyPr>
+            <a:normAutofit/>
+          </a:bodyPr>
+          <a:lstStyle/>
+          <a:p>
+            <a:r>
+              <a:rPr lang="en-GB" sz="3600" dirty="0"/>
+              <a:t>Active Learning: provide feedback during learning</a:t>
+            </a:r>
+            <a:endParaRPr lang="en-DK" sz="3600" dirty="0"/>
+          </a:p>
+        </p:txBody>
+      </p:sp>
+      <p:sp>
+        <p:nvSpPr>
+          <p:cNvPr id="3" name="Content Placeholder 2">
+            <a:extLst>
+              <a:ext uri="{FF2B5EF4-FFF2-40B4-BE49-F238E27FC236}">
+                <a16:creationId xmlns:a16="http://schemas.microsoft.com/office/drawing/2014/main" id="{3AC0E0DF-8014-BA56-573F-5BB7B3CA8C53}"/>
+              </a:ext>
+            </a:extLst>
+          </p:cNvPr>
+          <p:cNvSpPr>
+            <a:spLocks noGrp="1"/>
+          </p:cNvSpPr>
+          <p:nvPr>
+            <p:ph idx="1"/>
+          </p:nvPr>
+        </p:nvSpPr>
+        <p:spPr>
+          <a:xfrm>
+            <a:off x="838200" y="1611616"/>
+            <a:ext cx="10515600" cy="4351338"/>
+          </a:xfrm>
+        </p:spPr>
+        <p:txBody>
+          <a:bodyPr/>
+          <a:lstStyle/>
+          <a:p>
+            <a:r>
+              <a:rPr lang="en-GB" sz="2000" dirty="0"/>
+              <a:t>A method for creating more efficient training data when classification is particularly </a:t>
+            </a:r>
+            <a:r>
+              <a:rPr lang="en-GB" sz="2000" i="1" dirty="0"/>
+              <a:t>time-consuming</a:t>
+            </a:r>
+            <a:r>
+              <a:rPr lang="en-GB" sz="2000" dirty="0"/>
+              <a:t> or </a:t>
+            </a:r>
+            <a:r>
+              <a:rPr lang="en-GB" sz="2000" i="1" dirty="0"/>
+              <a:t>expensive</a:t>
+            </a:r>
+          </a:p>
+          <a:p>
+            <a:endParaRPr lang="en-DK" dirty="0"/>
+          </a:p>
+        </p:txBody>
+      </p:sp>
+      <p:pic>
+        <p:nvPicPr>
+          <p:cNvPr id="10" name="Picture 4">
+            <a:extLst>
+              <a:ext uri="{FF2B5EF4-FFF2-40B4-BE49-F238E27FC236}">
+                <a16:creationId xmlns:a16="http://schemas.microsoft.com/office/drawing/2014/main" id="{46BA0053-0813-D904-D1B8-2F2DD99EAFC0}"/>
               </a:ext>
             </a:extLst>
           </p:cNvPr>
@@ -7757,8 +9616,8 @@
         </p:blipFill>
         <p:spPr bwMode="auto">
           <a:xfrm>
-            <a:off x="2758189" y="2936061"/>
-            <a:ext cx="6118485" cy="3441648"/>
+            <a:off x="423855" y="2504953"/>
+            <a:ext cx="5370735" cy="3580490"/>
           </a:xfrm>
           <a:prstGeom prst="rect">
             <a:avLst/>
@@ -7777,10 +9636,10 @@
       </p:pic>
       <p:pic>
         <p:nvPicPr>
-          <p:cNvPr id="5" name="Picture 4">
-            <a:extLst>
-              <a:ext uri="{FF2B5EF4-FFF2-40B4-BE49-F238E27FC236}">
-                <a16:creationId xmlns:a16="http://schemas.microsoft.com/office/drawing/2014/main" id="{D8151C0C-DD50-90C8-4C55-B0E4815C68E8}"/>
+          <p:cNvPr id="12" name="Picture 11">
+            <a:extLst>
+              <a:ext uri="{FF2B5EF4-FFF2-40B4-BE49-F238E27FC236}">
+                <a16:creationId xmlns:a16="http://schemas.microsoft.com/office/drawing/2014/main" id="{A761D2CF-61CD-C8C3-A51D-1120C8AC5EB0}"/>
               </a:ext>
             </a:extLst>
           </p:cNvPr>
@@ -7797,8 +9656,8 @@
         </p:blipFill>
         <p:spPr>
           <a:xfrm>
-            <a:off x="838200" y="2976549"/>
-            <a:ext cx="9827520" cy="3335351"/>
+            <a:off x="6208935" y="2504953"/>
+            <a:ext cx="5370735" cy="4282440"/>
           </a:xfrm>
           <a:prstGeom prst="rect">
             <a:avLst/>
@@ -7808,105 +9667,28 @@
     </p:spTree>
     <p:extLst>
       <p:ext uri="{BB962C8B-B14F-4D97-AF65-F5344CB8AC3E}">
-        <p14:creationId xmlns:p14="http://schemas.microsoft.com/office/powerpoint/2010/main" val="418290538"/>
+        <p14:creationId xmlns:p14="http://schemas.microsoft.com/office/powerpoint/2010/main" val="3978556320"/>
       </p:ext>
     </p:extLst>
   </p:cSld>
   <p:clrMapOvr>
     <a:masterClrMapping/>
   </p:clrMapOvr>
-  <p:timing>
-    <p:tnLst>
-      <p:par>
-        <p:cTn id="1" dur="indefinite" restart="never" nodeType="tmRoot">
-          <p:childTnLst>
-            <p:seq concurrent="1" nextAc="seek">
-              <p:cTn id="2" dur="indefinite" nodeType="mainSeq">
-                <p:childTnLst>
-                  <p:par>
-                    <p:cTn id="3" fill="hold">
-                      <p:stCondLst>
-                        <p:cond delay="indefinite"/>
-                      </p:stCondLst>
-                      <p:childTnLst>
-                        <p:par>
-                          <p:cTn id="4" fill="hold">
-                            <p:stCondLst>
-                              <p:cond delay="0"/>
-                            </p:stCondLst>
-                            <p:childTnLst>
-                              <p:par>
-                                <p:cTn id="5" presetID="10" presetClass="entr" presetSubtype="0" fill="hold" nodeType="clickEffect">
-                                  <p:stCondLst>
-                                    <p:cond delay="0"/>
-                                  </p:stCondLst>
-                                  <p:childTnLst>
-                                    <p:set>
-                                      <p:cBhvr>
-                                        <p:cTn id="6" dur="1" fill="hold">
-                                          <p:stCondLst>
-                                            <p:cond delay="0"/>
-                                          </p:stCondLst>
-                                        </p:cTn>
-                                        <p:tgtEl>
-                                          <p:spTgt spid="5"/>
-                                        </p:tgtEl>
-                                        <p:attrNameLst>
-                                          <p:attrName>style.visibility</p:attrName>
-                                        </p:attrNameLst>
-                                      </p:cBhvr>
-                                      <p:to>
-                                        <p:strVal val="visible"/>
-                                      </p:to>
-                                    </p:set>
-                                    <p:animEffect transition="in" filter="fade">
-                                      <p:cBhvr>
-                                        <p:cTn id="7" dur="500"/>
-                                        <p:tgtEl>
-                                          <p:spTgt spid="5"/>
-                                        </p:tgtEl>
-                                      </p:cBhvr>
-                                    </p:animEffect>
-                                  </p:childTnLst>
-                                </p:cTn>
-                              </p:par>
-                            </p:childTnLst>
-                          </p:cTn>
-                        </p:par>
-                      </p:childTnLst>
-                    </p:cTn>
-                  </p:par>
-                </p:childTnLst>
-              </p:cTn>
-              <p:prevCondLst>
-                <p:cond evt="onPrev" delay="0">
-                  <p:tgtEl>
-                    <p:sldTgt/>
-                  </p:tgtEl>
-                </p:cond>
-              </p:prevCondLst>
-              <p:nextCondLst>
-                <p:cond evt="onNext" delay="0">
-                  <p:tgtEl>
-                    <p:sldTgt/>
-                  </p:tgtEl>
-                </p:cond>
-              </p:nextCondLst>
-            </p:seq>
-          </p:childTnLst>
-        </p:cTn>
-      </p:par>
-    </p:tnLst>
-  </p:timing>
 </p:sld>
 </file>
 
-<file path=ppt/slides/slide5.xml><?xml version="1.0" encoding="utf-8"?>
+<file path=ppt/slides/slide6.xml><?xml version="1.0" encoding="utf-8"?>
 <p:sld xmlns:a="http://schemas.openxmlformats.org/drawingml/2006/main" xmlns:r="http://schemas.openxmlformats.org/officeDocument/2006/relationships" xmlns:p="http://schemas.openxmlformats.org/presentationml/2006/main">
   <p:cSld>
     <p:spTree>
       <p:nvGrpSpPr>
-        <p:cNvPr id="1" name=""/>
+        <p:cNvPr id="1" name="">
+          <a:extLst>
+            <a:ext uri="{FF2B5EF4-FFF2-40B4-BE49-F238E27FC236}">
+              <a16:creationId xmlns:a16="http://schemas.microsoft.com/office/drawing/2014/main" id="{BD36587B-CD19-0801-729E-91BB76B6D2CB}"/>
+            </a:ext>
+          </a:extLst>
+        </p:cNvPr>
         <p:cNvGrpSpPr/>
         <p:nvPr/>
       </p:nvGrpSpPr>
@@ -7923,7 +9705,7 @@
           <p:cNvPr id="2" name="Title 1">
             <a:extLst>
               <a:ext uri="{FF2B5EF4-FFF2-40B4-BE49-F238E27FC236}">
-                <a16:creationId xmlns:a16="http://schemas.microsoft.com/office/drawing/2014/main" id="{1F7CBC05-1738-5537-2421-AE7559BB8EAA}"/>
+                <a16:creationId xmlns:a16="http://schemas.microsoft.com/office/drawing/2014/main" id="{DA4EEC6A-802F-8865-EE6E-B66AC35EA527}"/>
               </a:ext>
             </a:extLst>
           </p:cNvPr>
@@ -7936,14 +9718,16 @@
         </p:nvSpPr>
         <p:spPr/>
         <p:txBody>
-          <a:bodyPr/>
-          <a:lstStyle/>
-          <a:p>
-            <a:r>
-              <a:rPr lang="en-GB" dirty="0"/>
-              <a:t>Discussion of other methods</a:t>
-            </a:r>
-            <a:endParaRPr lang="en-DK" dirty="0"/>
+          <a:bodyPr>
+            <a:normAutofit/>
+          </a:bodyPr>
+          <a:lstStyle/>
+          <a:p>
+            <a:r>
+              <a:rPr lang="en-GB" sz="3600" dirty="0"/>
+              <a:t>What does this mean?</a:t>
+            </a:r>
+            <a:endParaRPr lang="en-DK" sz="3600" dirty="0"/>
           </a:p>
         </p:txBody>
       </p:sp>
@@ -7952,7 +9736,7 @@
           <p:cNvPr id="3" name="Content Placeholder 2">
             <a:extLst>
               <a:ext uri="{FF2B5EF4-FFF2-40B4-BE49-F238E27FC236}">
-                <a16:creationId xmlns:a16="http://schemas.microsoft.com/office/drawing/2014/main" id="{6DA85D33-DDA9-B410-32BE-AB182F30ED38}"/>
+                <a16:creationId xmlns:a16="http://schemas.microsoft.com/office/drawing/2014/main" id="{6E291B08-4CF5-AA26-B090-9D6995E10E17}"/>
               </a:ext>
             </a:extLst>
           </p:cNvPr>
@@ -7963,35 +9747,101 @@
             <p:ph idx="1"/>
           </p:nvPr>
         </p:nvSpPr>
-        <p:spPr/>
-        <p:txBody>
-          <a:bodyPr/>
-          <a:lstStyle/>
-          <a:p>
-            <a:r>
-              <a:rPr lang="en-GB" dirty="0"/>
-              <a:t>Top-to-bottom: effective in the beginning, but becomes less effective for each step (figure on the way Lone)</a:t>
-            </a:r>
-          </a:p>
-          <a:p>
-            <a:r>
-              <a:rPr lang="en-GB" dirty="0"/>
-              <a:t>…</a:t>
-            </a:r>
-          </a:p>
-          <a:p>
-            <a:r>
-              <a:rPr lang="en-GB" dirty="0"/>
-              <a:t>Other methods? </a:t>
-            </a:r>
-            <a:endParaRPr lang="en-DK" dirty="0"/>
+        <p:spPr>
+          <a:xfrm>
+            <a:off x="838200" y="1611615"/>
+            <a:ext cx="10515600" cy="4715541"/>
+          </a:xfrm>
+        </p:spPr>
+        <p:txBody>
+          <a:bodyPr>
+            <a:noAutofit/>
+          </a:bodyPr>
+          <a:lstStyle/>
+          <a:p>
+            <a:pPr marL="0" indent="0">
+              <a:buNone/>
+            </a:pPr>
+            <a:r>
+              <a:rPr lang="en-GB" sz="1800" dirty="0"/>
+              <a:t>Random selection is better than top-down (for machine learning models)</a:t>
+            </a:r>
+          </a:p>
+          <a:p>
+            <a:pPr marL="0" indent="0">
+              <a:buNone/>
+            </a:pPr>
+            <a:endParaRPr lang="en-GB" sz="1800" dirty="0"/>
+          </a:p>
+          <a:p>
+            <a:pPr marL="0" indent="0">
+              <a:buNone/>
+            </a:pPr>
+            <a:r>
+              <a:rPr lang="en-GB" sz="1800" dirty="0"/>
+              <a:t>Active learning outperforms passive learning, but there are diminishing returns from around 40% in our case</a:t>
+            </a:r>
+          </a:p>
+          <a:p>
+            <a:pPr marL="0" indent="0">
+              <a:buNone/>
+            </a:pPr>
+            <a:endParaRPr lang="en-GB" sz="1800" dirty="0"/>
+          </a:p>
+          <a:p>
+            <a:pPr marL="0" indent="0">
+              <a:buNone/>
+            </a:pPr>
+            <a:r>
+              <a:rPr lang="en-GB" sz="1800" dirty="0"/>
+              <a:t>In all researched cases, (done correctly) </a:t>
+            </a:r>
+            <a:r>
+              <a:rPr lang="en-GB" sz="1800" b="1" dirty="0"/>
+              <a:t>active learning is better or just-as-good as random selection</a:t>
+            </a:r>
+            <a:r>
+              <a:rPr lang="en-GB" sz="1800" dirty="0"/>
+              <a:t>.</a:t>
+            </a:r>
+          </a:p>
+          <a:p>
+            <a:pPr marL="0" indent="0">
+              <a:buNone/>
+            </a:pPr>
+            <a:endParaRPr lang="en-GB" sz="1800" dirty="0"/>
+          </a:p>
+          <a:p>
+            <a:pPr marL="0" indent="0">
+              <a:buNone/>
+            </a:pPr>
+            <a:r>
+              <a:rPr lang="en-GB" sz="1800" dirty="0"/>
+              <a:t>If you’re working with detailed datasets, like individualized (with age, gender, year, etc) machine learning methods could be great. </a:t>
+            </a:r>
+            <a:r>
+              <a:rPr lang="en-GB" sz="1800" b="1" dirty="0"/>
+              <a:t>Machine learning LOVES data!</a:t>
+            </a:r>
+          </a:p>
+          <a:p>
+            <a:pPr marL="0" indent="0">
+              <a:buNone/>
+            </a:pPr>
+            <a:endParaRPr lang="en-GB" sz="1800" dirty="0"/>
+          </a:p>
+          <a:p>
+            <a:pPr marL="0" indent="0">
+              <a:buNone/>
+            </a:pPr>
+            <a:endParaRPr lang="en-GB" sz="1800" dirty="0"/>
           </a:p>
         </p:txBody>
       </p:sp>
     </p:spTree>
     <p:extLst>
       <p:ext uri="{BB962C8B-B14F-4D97-AF65-F5344CB8AC3E}">
-        <p14:creationId xmlns:p14="http://schemas.microsoft.com/office/powerpoint/2010/main" val="1868762423"/>
+        <p14:creationId xmlns:p14="http://schemas.microsoft.com/office/powerpoint/2010/main" val="2538114804"/>
       </p:ext>
     </p:extLst>
   </p:cSld>
